--- a/profile/sources/Siumutool activity diagram - new.pptx
+++ b/profile/sources/Siumutool activity diagram - new.pptx
@@ -1,20 +1,23 @@
 
 <file path=ppt/presentation.xml><?xml version="1.0" encoding="utf-8"?>
-<p:presentation xmlns:a="http://schemas.openxmlformats.org/drawingml/2006/main" xmlns:r="http://schemas.openxmlformats.org/officeDocument/2006/relationships" xmlns:p="http://schemas.openxmlformats.org/presentationml/2006/main">
+<p:presentation xmlns:a="http://schemas.openxmlformats.org/drawingml/2006/main" xmlns:r="http://schemas.openxmlformats.org/officeDocument/2006/relationships" xmlns:p="http://schemas.openxmlformats.org/presentationml/2006/main" xmlns:m="http://schemas.openxmlformats.org/officeDocument/2006/math" xmlns:w="http://schemas.openxmlformats.org/wordprocessingml/2006/main">
   <p:sldMasterIdLst>
     <p:sldMasterId id="2147483648" r:id="rId1"/>
   </p:sldMasterIdLst>
+  <p:notesMasterIdLst>
+    <p:notesMasterId r:id="rId5"/>
+  </p:notesMasterIdLst>
   <p:sldIdLst>
-    <p:sldId id="258" r:id="rId2"/>
+    <p:sldId id="256" r:id="rId4"/>
   </p:sldIdLst>
   <p:sldSz cx="9144000" cy="6858000" type="screen4x3"/>
   <p:notesSz cx="7559675" cy="10691813"/>
   <p:defaultTextStyle>
     <a:defPPr>
-      <a:defRPr lang="en-DE"/>
+      <a:defRPr/>
     </a:defPPr>
-    <a:lvl1pPr marL="0" algn="l" defTabSz="914400" rtl="0" eaLnBrk="1" latinLnBrk="0" hangingPunct="1">
-      <a:defRPr sz="1800" kern="1200">
+    <a:lvl1pPr marL="0" algn="l" defTabSz="914400" rtl="0">
+      <a:defRPr sz="1800">
         <a:solidFill>
           <a:schemeClr val="tx1"/>
         </a:solidFill>
@@ -23,8 +26,8 @@
         <a:cs typeface="+mn-cs"/>
       </a:defRPr>
     </a:lvl1pPr>
-    <a:lvl2pPr marL="457200" algn="l" defTabSz="914400" rtl="0" eaLnBrk="1" latinLnBrk="0" hangingPunct="1">
-      <a:defRPr sz="1800" kern="1200">
+    <a:lvl2pPr marL="457200" algn="l" defTabSz="914400" rtl="0">
+      <a:defRPr sz="1800">
         <a:solidFill>
           <a:schemeClr val="tx1"/>
         </a:solidFill>
@@ -33,8 +36,8 @@
         <a:cs typeface="+mn-cs"/>
       </a:defRPr>
     </a:lvl2pPr>
-    <a:lvl3pPr marL="914400" algn="l" defTabSz="914400" rtl="0" eaLnBrk="1" latinLnBrk="0" hangingPunct="1">
-      <a:defRPr sz="1800" kern="1200">
+    <a:lvl3pPr marL="914400" algn="l" defTabSz="914400" rtl="0">
+      <a:defRPr sz="1800">
         <a:solidFill>
           <a:schemeClr val="tx1"/>
         </a:solidFill>
@@ -43,8 +46,8 @@
         <a:cs typeface="+mn-cs"/>
       </a:defRPr>
     </a:lvl3pPr>
-    <a:lvl4pPr marL="1371600" algn="l" defTabSz="914400" rtl="0" eaLnBrk="1" latinLnBrk="0" hangingPunct="1">
-      <a:defRPr sz="1800" kern="1200">
+    <a:lvl4pPr marL="1371600" algn="l" defTabSz="914400" rtl="0">
+      <a:defRPr sz="1800">
         <a:solidFill>
           <a:schemeClr val="tx1"/>
         </a:solidFill>
@@ -53,8 +56,8 @@
         <a:cs typeface="+mn-cs"/>
       </a:defRPr>
     </a:lvl4pPr>
-    <a:lvl5pPr marL="1828800" algn="l" defTabSz="914400" rtl="0" eaLnBrk="1" latinLnBrk="0" hangingPunct="1">
-      <a:defRPr sz="1800" kern="1200">
+    <a:lvl5pPr marL="1828800" algn="l" defTabSz="914400" rtl="0">
+      <a:defRPr sz="1800">
         <a:solidFill>
           <a:schemeClr val="tx1"/>
         </a:solidFill>
@@ -63,8 +66,8 @@
         <a:cs typeface="+mn-cs"/>
       </a:defRPr>
     </a:lvl5pPr>
-    <a:lvl6pPr marL="2286000" algn="l" defTabSz="914400" rtl="0" eaLnBrk="1" latinLnBrk="0" hangingPunct="1">
-      <a:defRPr sz="1800" kern="1200">
+    <a:lvl6pPr marL="2286000" algn="l" defTabSz="914400" rtl="0">
+      <a:defRPr sz="1800">
         <a:solidFill>
           <a:schemeClr val="tx1"/>
         </a:solidFill>
@@ -73,8 +76,8 @@
         <a:cs typeface="+mn-cs"/>
       </a:defRPr>
     </a:lvl6pPr>
-    <a:lvl7pPr marL="2743200" algn="l" defTabSz="914400" rtl="0" eaLnBrk="1" latinLnBrk="0" hangingPunct="1">
-      <a:defRPr sz="1800" kern="1200">
+    <a:lvl7pPr marL="2743200" algn="l" defTabSz="914400" rtl="0">
+      <a:defRPr sz="1800">
         <a:solidFill>
           <a:schemeClr val="tx1"/>
         </a:solidFill>
@@ -83,8 +86,8 @@
         <a:cs typeface="+mn-cs"/>
       </a:defRPr>
     </a:lvl7pPr>
-    <a:lvl8pPr marL="3200400" algn="l" defTabSz="914400" rtl="0" eaLnBrk="1" latinLnBrk="0" hangingPunct="1">
-      <a:defRPr sz="1800" kern="1200">
+    <a:lvl8pPr marL="3200400" algn="l" defTabSz="914400" rtl="0">
+      <a:defRPr sz="1800">
         <a:solidFill>
           <a:schemeClr val="tx1"/>
         </a:solidFill>
@@ -93,8 +96,8 @@
         <a:cs typeface="+mn-cs"/>
       </a:defRPr>
     </a:lvl8pPr>
-    <a:lvl9pPr marL="3657600" algn="l" defTabSz="914400" rtl="0" eaLnBrk="1" latinLnBrk="0" hangingPunct="1">
-      <a:defRPr sz="1800" kern="1200">
+    <a:lvl9pPr marL="3657600" algn="l" defTabSz="914400" rtl="0">
+      <a:defRPr sz="1800">
         <a:solidFill>
           <a:schemeClr val="tx1"/>
         </a:solidFill>
@@ -104,16 +107,416 @@
       </a:defRPr>
     </a:lvl9pPr>
   </p:defaultTextStyle>
-  <p:extLst>
-    <p:ext uri="{EFAFB233-063F-42B5-8137-9DF3F51BA10A}">
-      <p15:sldGuideLst xmlns:p15="http://schemas.microsoft.com/office/powerpoint/2012/main"/>
-    </p:ext>
-  </p:extLst>
 </p:presentation>
 </file>
 
+<file path=ppt/notesMasters/notesMaster1.xml><?xml version="1.0" encoding="utf-8"?>
+<p:notesMaster xmlns:a="http://schemas.openxmlformats.org/drawingml/2006/main" xmlns:r="http://schemas.openxmlformats.org/officeDocument/2006/relationships" xmlns:p="http://schemas.openxmlformats.org/presentationml/2006/main">
+  <p:cSld name="">
+    <p:bg>
+      <p:bgRef idx="1001">
+        <a:schemeClr val="bg1"/>
+      </p:bgRef>
+    </p:bg>
+    <p:spTree>
+      <p:nvGrpSpPr>
+        <p:cNvPr id="1" name=""/>
+        <p:cNvGrpSpPr/>
+        <p:nvPr/>
+      </p:nvGrpSpPr>
+      <p:grpSpPr bwMode="auto">
+        <a:xfrm>
+          <a:off x="0" y="0"/>
+          <a:ext cx="0" cy="0"/>
+          <a:chOff x="0" y="0"/>
+          <a:chExt cx="0" cy="0"/>
+        </a:xfrm>
+      </p:grpSpPr>
+      <p:sp>
+        <p:nvSpPr>
+          <p:cNvPr id="2" name="Header Placeholder 1"/>
+          <p:cNvSpPr>
+            <a:spLocks noGrp="1"/>
+          </p:cNvSpPr>
+          <p:nvPr>
+            <p:ph type="hdr" sz="quarter"/>
+          </p:nvPr>
+        </p:nvSpPr>
+        <p:spPr bwMode="auto">
+          <a:xfrm>
+            <a:off x="0" y="0"/>
+            <a:ext cx="2971800" cy="458788"/>
+          </a:xfrm>
+          <a:prstGeom prst="rect">
+            <a:avLst/>
+          </a:prstGeom>
+        </p:spPr>
+        <p:txBody>
+          <a:bodyPr vert="horz" lIns="91440" tIns="45720" rIns="91440" bIns="45720" rtlCol="0" anchor="ctr"/>
+          <a:lstStyle>
+            <a:lvl1pPr algn="l">
+              <a:defRPr sz="1200"/>
+            </a:lvl1pPr>
+          </a:lstStyle>
+          <a:p>
+            <a:pPr>
+              <a:defRPr/>
+            </a:pPr>
+            <a:endParaRPr/>
+          </a:p>
+        </p:txBody>
+      </p:sp>
+      <p:sp>
+        <p:nvSpPr>
+          <p:cNvPr id="3" name="Date Placeholder 2"/>
+          <p:cNvSpPr>
+            <a:spLocks noGrp="1"/>
+          </p:cNvSpPr>
+          <p:nvPr>
+            <p:ph type="dt" idx="2"/>
+          </p:nvPr>
+        </p:nvSpPr>
+        <p:spPr bwMode="auto">
+          <a:xfrm>
+            <a:off x="3884613" y="0"/>
+            <a:ext cx="2971800" cy="458788"/>
+          </a:xfrm>
+          <a:prstGeom prst="rect">
+            <a:avLst/>
+          </a:prstGeom>
+        </p:spPr>
+        <p:txBody>
+          <a:bodyPr vert="horz" lIns="91440" tIns="45720" rIns="91440" bIns="45720" rtlCol="0" anchor="ctr"/>
+          <a:lstStyle>
+            <a:lvl1pPr algn="r">
+              <a:defRPr sz="1200"/>
+            </a:lvl1pPr>
+          </a:lstStyle>
+          <a:p>
+            <a:pPr>
+              <a:defRPr/>
+            </a:pPr>
+            <a:endParaRPr/>
+          </a:p>
+        </p:txBody>
+      </p:sp>
+      <p:sp>
+        <p:nvSpPr>
+          <p:cNvPr id="3" name="Date Placeholder 2"/>
+          <p:cNvSpPr>
+            <a:spLocks noGrp="1"/>
+          </p:cNvSpPr>
+          <p:nvPr>
+            <p:ph type="dt" idx="3"/>
+          </p:nvPr>
+        </p:nvSpPr>
+        <p:spPr bwMode="auto">
+          <a:xfrm>
+            <a:off x="3884613" y="0"/>
+            <a:ext cx="2971800" cy="458788"/>
+          </a:xfrm>
+          <a:prstGeom prst="rect">
+            <a:avLst/>
+          </a:prstGeom>
+        </p:spPr>
+        <p:txBody>
+          <a:bodyPr vert="horz" lIns="91440" tIns="45720" rIns="91440" bIns="45720" rtlCol="0" anchor="ctr"/>
+          <a:lstStyle>
+            <a:lvl1pPr algn="r">
+              <a:defRPr sz="1200"/>
+            </a:lvl1pPr>
+          </a:lstStyle>
+          <a:p>
+            <a:pPr>
+              <a:defRPr/>
+            </a:pPr>
+            <a:endParaRPr/>
+          </a:p>
+        </p:txBody>
+      </p:sp>
+      <p:sp>
+        <p:nvSpPr>
+          <p:cNvPr id="5" name="Notes Placeholder 4"/>
+          <p:cNvSpPr>
+            <a:spLocks noGrp="1"/>
+          </p:cNvSpPr>
+          <p:nvPr>
+            <p:ph type="body" sz="quarter" idx="1"/>
+          </p:nvPr>
+        </p:nvSpPr>
+        <p:spPr bwMode="auto">
+          <a:xfrm>
+            <a:off x="685800" y="4400550"/>
+            <a:ext cx="5486400" cy="3600450"/>
+          </a:xfrm>
+          <a:prstGeom prst="rect">
+            <a:avLst/>
+          </a:prstGeom>
+        </p:spPr>
+        <p:txBody>
+          <a:bodyPr vert="horz" lIns="91440" tIns="45720" rIns="91440" bIns="45720" rtlCol="0" anchor="ctr"/>
+          <a:lstStyle/>
+          <a:p>
+            <a:pPr>
+              <a:defRPr/>
+            </a:pPr>
+            <a:endParaRPr/>
+          </a:p>
+        </p:txBody>
+      </p:sp>
+      <p:sp>
+        <p:nvSpPr>
+          <p:cNvPr id="6" name="Footer Placeholder 5"/>
+          <p:cNvSpPr>
+            <a:spLocks noGrp="1"/>
+          </p:cNvSpPr>
+          <p:nvPr>
+            <p:ph type="ftr" sz="quarter" idx="4"/>
+          </p:nvPr>
+        </p:nvSpPr>
+        <p:spPr bwMode="auto">
+          <a:xfrm>
+            <a:off x="0" y="8685213"/>
+            <a:ext cx="2971800" cy="458787"/>
+          </a:xfrm>
+          <a:prstGeom prst="rect">
+            <a:avLst/>
+          </a:prstGeom>
+        </p:spPr>
+        <p:txBody>
+          <a:bodyPr vert="horz" lIns="91440" tIns="45720" rIns="91440" bIns="45720" rtlCol="0" anchor="b"/>
+          <a:lstStyle>
+            <a:lvl1pPr algn="l">
+              <a:defRPr sz="1200"/>
+            </a:lvl1pPr>
+          </a:lstStyle>
+          <a:p>
+            <a:pPr>
+              <a:defRPr/>
+            </a:pPr>
+            <a:endParaRPr/>
+          </a:p>
+        </p:txBody>
+      </p:sp>
+      <p:sp>
+        <p:nvSpPr>
+          <p:cNvPr id="7" name="Slide Number Placeholder 6"/>
+          <p:cNvSpPr>
+            <a:spLocks noGrp="1"/>
+          </p:cNvSpPr>
+          <p:nvPr>
+            <p:ph type="sldNum" sz="quarter" idx="10"/>
+          </p:nvPr>
+        </p:nvSpPr>
+        <p:spPr bwMode="auto">
+          <a:xfrm>
+            <a:off x="3884613" y="8685213"/>
+            <a:ext cx="2971800" cy="458787"/>
+          </a:xfrm>
+          <a:prstGeom prst="rect">
+            <a:avLst/>
+          </a:prstGeom>
+        </p:spPr>
+        <p:txBody>
+          <a:bodyPr vert="horz" lIns="91440" tIns="45720" rIns="91440" bIns="45720" rtlCol="0" anchor="b"/>
+          <a:lstStyle>
+            <a:lvl1pPr algn="r">
+              <a:defRPr sz="1200"/>
+            </a:lvl1pPr>
+          </a:lstStyle>
+          <a:p>
+            <a:pPr>
+              <a:defRPr/>
+            </a:pPr>
+            <a:endParaRPr/>
+          </a:p>
+        </p:txBody>
+      </p:sp>
+    </p:spTree>
+  </p:cSld>
+  <p:clrMap bg1="lt1" tx1="dk1" bg2="lt2" tx2="dk2" accent1="accent1" accent2="accent2" accent3="accent3" accent4="accent4" accent5="accent5" accent6="accent6" hlink="hlink" folHlink="folHlink"/>
+  <p:notesStyle>
+    <a:lvl1pPr marL="0" algn="l" defTabSz="914400">
+      <a:defRPr sz="1200">
+        <a:solidFill>
+          <a:schemeClr val="tx1"/>
+        </a:solidFill>
+        <a:latin typeface="+mn-lt"/>
+        <a:ea typeface="+mn-ea"/>
+        <a:cs typeface="+mn-cs"/>
+      </a:defRPr>
+    </a:lvl1pPr>
+    <a:lvl2pPr marL="457200" algn="l" defTabSz="914400">
+      <a:defRPr sz="1200">
+        <a:solidFill>
+          <a:schemeClr val="tx1"/>
+        </a:solidFill>
+        <a:latin typeface="+mn-lt"/>
+        <a:ea typeface="+mn-ea"/>
+        <a:cs typeface="+mn-cs"/>
+      </a:defRPr>
+    </a:lvl2pPr>
+    <a:lvl3pPr marL="914400" algn="l" defTabSz="914400">
+      <a:defRPr sz="1200">
+        <a:solidFill>
+          <a:schemeClr val="tx1"/>
+        </a:solidFill>
+        <a:latin typeface="+mn-lt"/>
+        <a:ea typeface="+mn-ea"/>
+        <a:cs typeface="+mn-cs"/>
+      </a:defRPr>
+    </a:lvl3pPr>
+    <a:lvl4pPr marL="1371600" algn="l" defTabSz="914400">
+      <a:defRPr sz="1200">
+        <a:solidFill>
+          <a:schemeClr val="tx1"/>
+        </a:solidFill>
+        <a:latin typeface="+mn-lt"/>
+        <a:ea typeface="+mn-ea"/>
+        <a:cs typeface="+mn-cs"/>
+      </a:defRPr>
+    </a:lvl4pPr>
+    <a:lvl5pPr marL="1828800" algn="l" defTabSz="914400">
+      <a:defRPr sz="1200">
+        <a:solidFill>
+          <a:schemeClr val="tx1"/>
+        </a:solidFill>
+        <a:latin typeface="+mn-lt"/>
+        <a:ea typeface="+mn-ea"/>
+        <a:cs typeface="+mn-cs"/>
+      </a:defRPr>
+    </a:lvl5pPr>
+    <a:lvl6pPr marL="2286000" algn="l" defTabSz="914400">
+      <a:defRPr sz="1200">
+        <a:solidFill>
+          <a:schemeClr val="tx1"/>
+        </a:solidFill>
+        <a:latin typeface="+mn-lt"/>
+        <a:ea typeface="+mn-ea"/>
+        <a:cs typeface="+mn-cs"/>
+      </a:defRPr>
+    </a:lvl6pPr>
+    <a:lvl7pPr marL="2743200" algn="l" defTabSz="914400">
+      <a:defRPr sz="1200">
+        <a:solidFill>
+          <a:schemeClr val="tx1"/>
+        </a:solidFill>
+        <a:latin typeface="+mn-lt"/>
+        <a:ea typeface="+mn-ea"/>
+        <a:cs typeface="+mn-cs"/>
+      </a:defRPr>
+    </a:lvl7pPr>
+    <a:lvl8pPr marL="3200400" algn="l" defTabSz="914400">
+      <a:defRPr sz="1200">
+        <a:solidFill>
+          <a:schemeClr val="tx1"/>
+        </a:solidFill>
+        <a:latin typeface="+mn-lt"/>
+        <a:ea typeface="+mn-ea"/>
+        <a:cs typeface="+mn-cs"/>
+      </a:defRPr>
+    </a:lvl8pPr>
+    <a:lvl9pPr marL="3657600" algn="l" defTabSz="914400">
+      <a:defRPr sz="1200">
+        <a:solidFill>
+          <a:schemeClr val="tx1"/>
+        </a:solidFill>
+        <a:latin typeface="+mn-lt"/>
+        <a:ea typeface="+mn-ea"/>
+        <a:cs typeface="+mn-cs"/>
+      </a:defRPr>
+    </a:lvl9pPr>
+  </p:notesStyle>
+</p:notesMaster>
+</file>
+
+<file path=ppt/notesSlides/notesSlide1.xml><?xml version="1.0" encoding="utf-8"?>
+<p:notes xmlns:a="http://schemas.openxmlformats.org/drawingml/2006/main" xmlns:r="http://schemas.openxmlformats.org/officeDocument/2006/relationships" xmlns:p="http://schemas.openxmlformats.org/presentationml/2006/main" xmlns:m="http://schemas.openxmlformats.org/officeDocument/2006/math" xmlns:w="http://schemas.openxmlformats.org/wordprocessingml/2006/main">
+  <p:cSld name="">
+    <p:spTree>
+      <p:nvGrpSpPr>
+        <p:cNvPr id="1" name=""/>
+        <p:cNvGrpSpPr/>
+        <p:nvPr/>
+      </p:nvGrpSpPr>
+      <p:grpSpPr bwMode="auto">
+        <a:xfrm>
+          <a:off x="0" y="0"/>
+          <a:ext cx="0" cy="0"/>
+          <a:chOff x="0" y="0"/>
+          <a:chExt cx="0" cy="0"/>
+        </a:xfrm>
+      </p:grpSpPr>
+      <p:sp>
+        <p:nvSpPr>
+          <p:cNvPr id="2" name="Slide Image Placeholder 1"/>
+          <p:cNvSpPr>
+            <a:spLocks noChangeAspect="1" noGrp="1" noRot="1"/>
+          </p:cNvSpPr>
+          <p:nvPr>
+            <p:ph type="sldImg"/>
+          </p:nvPr>
+        </p:nvSpPr>
+        <p:spPr bwMode="auto"/>
+      </p:sp>
+      <p:sp>
+        <p:nvSpPr>
+          <p:cNvPr id="3" name="Notes Placeholder 2"/>
+          <p:cNvSpPr>
+            <a:spLocks noGrp="1"/>
+          </p:cNvSpPr>
+          <p:nvPr>
+            <p:ph type="body" idx="1"/>
+          </p:nvPr>
+        </p:nvSpPr>
+        <p:spPr bwMode="auto"/>
+        <p:txBody>
+          <a:bodyPr/>
+          <a:lstStyle/>
+          <a:p>
+            <a:pPr>
+              <a:defRPr/>
+            </a:pPr>
+            <a:endParaRPr/>
+          </a:p>
+        </p:txBody>
+      </p:sp>
+      <p:sp>
+        <p:nvSpPr>
+          <p:cNvPr id="4" name="Slide Number Placeholder 3"/>
+          <p:cNvSpPr>
+            <a:spLocks noGrp="1"/>
+          </p:cNvSpPr>
+          <p:nvPr>
+            <p:ph type="sldNum" sz="quarter" idx="10"/>
+          </p:nvPr>
+        </p:nvSpPr>
+        <p:spPr bwMode="auto"/>
+        <p:txBody>
+          <a:bodyPr/>
+          <a:lstStyle/>
+          <a:p>
+            <a:pPr>
+              <a:defRPr/>
+            </a:pPr>
+            <a:fld id="{776CF83C-9A49-EEA6-1913-9F9012C1A1AF}" type="slidenum">
+              <a:rPr/>
+              <a:t/>
+            </a:fld>
+            <a:endParaRPr/>
+          </a:p>
+        </p:txBody>
+      </p:sp>
+    </p:spTree>
+  </p:cSld>
+  <p:clrMapOvr>
+    <a:masterClrMapping/>
+  </p:clrMapOvr>
+</p:notes>
+</file>
+
 <file path=ppt/slideLayouts/slideLayout1.xml><?xml version="1.0" encoding="utf-8"?>
-<p:sldLayout xmlns:a="http://schemas.openxmlformats.org/drawingml/2006/main" xmlns:r="http://schemas.openxmlformats.org/officeDocument/2006/relationships" xmlns:p="http://schemas.openxmlformats.org/presentationml/2006/main" type="blank" preserve="1">
+<p:sldLayout xmlns:a="http://schemas.openxmlformats.org/drawingml/2006/main" xmlns:r="http://schemas.openxmlformats.org/officeDocument/2006/relationships" xmlns:p="http://schemas.openxmlformats.org/presentationml/2006/main" xmlns:m="http://schemas.openxmlformats.org/officeDocument/2006/math" xmlns:w="http://schemas.openxmlformats.org/wordprocessingml/2006/main" matchingName="" preserve="1" showMasterPhAnim="0" showMasterSp="1" type="blank" userDrawn="1">
   <p:cSld name="Blank Slide">
     <p:spTree>
       <p:nvGrpSpPr>
@@ -121,7 +524,7 @@
         <p:cNvGrpSpPr/>
         <p:nvPr/>
       </p:nvGrpSpPr>
-      <p:grpSpPr>
+      <p:grpSpPr bwMode="auto">
         <a:xfrm>
           <a:off x="0" y="0"/>
           <a:ext cx="0" cy="0"/>
@@ -138,7 +541,7 @@
 </file>
 
 <file path=ppt/slideLayouts/slideLayout10.xml><?xml version="1.0" encoding="utf-8"?>
-<p:sldLayout xmlns:a="http://schemas.openxmlformats.org/drawingml/2006/main" xmlns:r="http://schemas.openxmlformats.org/officeDocument/2006/relationships" xmlns:p="http://schemas.openxmlformats.org/presentationml/2006/main" type="objOverTx" preserve="1">
+<p:sldLayout xmlns:a="http://schemas.openxmlformats.org/drawingml/2006/main" xmlns:r="http://schemas.openxmlformats.org/officeDocument/2006/relationships" xmlns:p="http://schemas.openxmlformats.org/presentationml/2006/main" xmlns:m="http://schemas.openxmlformats.org/officeDocument/2006/math" xmlns:w="http://schemas.openxmlformats.org/wordprocessingml/2006/main" matchingName="" preserve="1" showMasterPhAnim="0" showMasterSp="1" type="objOverTx" userDrawn="1">
   <p:cSld name="Title, Content over Content">
     <p:spTree>
       <p:nvGrpSpPr>
@@ -146,7 +549,7 @@
         <p:cNvGrpSpPr/>
         <p:nvPr/>
       </p:nvGrpSpPr>
-      <p:grpSpPr>
+      <p:grpSpPr bwMode="auto">
         <a:xfrm>
           <a:off x="0" y="0"/>
           <a:ext cx="0" cy="0"/>
@@ -156,7 +559,7 @@
       </p:grpSpPr>
       <p:sp>
         <p:nvSpPr>
-          <p:cNvPr id="26" name="PlaceHolder 1"/>
+          <p:cNvPr id="1876235207" name="PlaceHolder 1"/>
           <p:cNvSpPr>
             <a:spLocks noGrp="1"/>
           </p:cNvSpPr>
@@ -164,7 +567,7 @@
             <p:ph type="title"/>
           </p:nvPr>
         </p:nvSpPr>
-        <p:spPr>
+        <p:spPr bwMode="auto">
           <a:xfrm>
             <a:off x="457200" y="274680"/>
             <a:ext cx="8229240" cy="1142640"/>
@@ -183,6 +586,9 @@
           </a:bodyPr>
           <a:lstStyle/>
           <a:p>
+            <a:pPr>
+              <a:defRPr/>
+            </a:pPr>
             <a:endParaRPr lang="en-US" sz="1800" b="0" strike="noStrike" spc="-1">
               <a:solidFill>
                 <a:srgbClr val="000000"/>
@@ -194,7 +600,7 @@
       </p:sp>
       <p:sp>
         <p:nvSpPr>
-          <p:cNvPr id="27" name="PlaceHolder 2"/>
+          <p:cNvPr id="2140928915" name="PlaceHolder 2"/>
           <p:cNvSpPr>
             <a:spLocks noGrp="1"/>
           </p:cNvSpPr>
@@ -202,7 +608,7 @@
             <p:ph/>
           </p:nvPr>
         </p:nvSpPr>
-        <p:spPr>
+        <p:spPr bwMode="auto">
           <a:xfrm>
             <a:off x="457200" y="1600200"/>
             <a:ext cx="8229240" cy="2158560"/>
@@ -221,6 +627,9 @@
           </a:bodyPr>
           <a:lstStyle/>
           <a:p>
+            <a:pPr>
+              <a:defRPr/>
+            </a:pPr>
             <a:endParaRPr lang="en-US" sz="3200" b="0" strike="noStrike" spc="-1">
               <a:solidFill>
                 <a:srgbClr val="000000"/>
@@ -232,7 +641,7 @@
       </p:sp>
       <p:sp>
         <p:nvSpPr>
-          <p:cNvPr id="28" name="PlaceHolder 3"/>
+          <p:cNvPr id="1238193636" name="PlaceHolder 3"/>
           <p:cNvSpPr>
             <a:spLocks noGrp="1"/>
           </p:cNvSpPr>
@@ -240,7 +649,7 @@
             <p:ph/>
           </p:nvPr>
         </p:nvSpPr>
-        <p:spPr>
+        <p:spPr bwMode="auto">
           <a:xfrm>
             <a:off x="457200" y="3964320"/>
             <a:ext cx="8229240" cy="2158560"/>
@@ -259,6 +668,9 @@
           </a:bodyPr>
           <a:lstStyle/>
           <a:p>
+            <a:pPr>
+              <a:defRPr/>
+            </a:pPr>
             <a:endParaRPr lang="en-US" sz="3200" b="0" strike="noStrike" spc="-1">
               <a:solidFill>
                 <a:srgbClr val="000000"/>
@@ -277,7 +689,7 @@
 </file>
 
 <file path=ppt/slideLayouts/slideLayout11.xml><?xml version="1.0" encoding="utf-8"?>
-<p:sldLayout xmlns:a="http://schemas.openxmlformats.org/drawingml/2006/main" xmlns:r="http://schemas.openxmlformats.org/officeDocument/2006/relationships" xmlns:p="http://schemas.openxmlformats.org/presentationml/2006/main" type="fourObj" preserve="1">
+<p:sldLayout xmlns:a="http://schemas.openxmlformats.org/drawingml/2006/main" xmlns:r="http://schemas.openxmlformats.org/officeDocument/2006/relationships" xmlns:p="http://schemas.openxmlformats.org/presentationml/2006/main" xmlns:m="http://schemas.openxmlformats.org/officeDocument/2006/math" xmlns:w="http://schemas.openxmlformats.org/wordprocessingml/2006/main" matchingName="" preserve="1" showMasterPhAnim="0" showMasterSp="1" type="fourObj" userDrawn="1">
   <p:cSld name="Title, 4 Content">
     <p:spTree>
       <p:nvGrpSpPr>
@@ -285,7 +697,7 @@
         <p:cNvGrpSpPr/>
         <p:nvPr/>
       </p:nvGrpSpPr>
-      <p:grpSpPr>
+      <p:grpSpPr bwMode="auto">
         <a:xfrm>
           <a:off x="0" y="0"/>
           <a:ext cx="0" cy="0"/>
@@ -295,7 +707,7 @@
       </p:grpSpPr>
       <p:sp>
         <p:nvSpPr>
-          <p:cNvPr id="29" name="PlaceHolder 1"/>
+          <p:cNvPr id="1799967820" name="PlaceHolder 1"/>
           <p:cNvSpPr>
             <a:spLocks noGrp="1"/>
           </p:cNvSpPr>
@@ -303,7 +715,7 @@
             <p:ph type="title"/>
           </p:nvPr>
         </p:nvSpPr>
-        <p:spPr>
+        <p:spPr bwMode="auto">
           <a:xfrm>
             <a:off x="457200" y="274680"/>
             <a:ext cx="8229240" cy="1142640"/>
@@ -322,6 +734,9 @@
           </a:bodyPr>
           <a:lstStyle/>
           <a:p>
+            <a:pPr>
+              <a:defRPr/>
+            </a:pPr>
             <a:endParaRPr lang="en-US" sz="1800" b="0" strike="noStrike" spc="-1">
               <a:solidFill>
                 <a:srgbClr val="000000"/>
@@ -333,7 +748,7 @@
       </p:sp>
       <p:sp>
         <p:nvSpPr>
-          <p:cNvPr id="30" name="PlaceHolder 2"/>
+          <p:cNvPr id="1152543001" name="PlaceHolder 2"/>
           <p:cNvSpPr>
             <a:spLocks noGrp="1"/>
           </p:cNvSpPr>
@@ -341,7 +756,7 @@
             <p:ph/>
           </p:nvPr>
         </p:nvSpPr>
-        <p:spPr>
+        <p:spPr bwMode="auto">
           <a:xfrm>
             <a:off x="457200" y="1600200"/>
             <a:ext cx="4015800" cy="2158560"/>
@@ -360,6 +775,9 @@
           </a:bodyPr>
           <a:lstStyle/>
           <a:p>
+            <a:pPr>
+              <a:defRPr/>
+            </a:pPr>
             <a:endParaRPr lang="en-US" sz="3200" b="0" strike="noStrike" spc="-1">
               <a:solidFill>
                 <a:srgbClr val="000000"/>
@@ -371,7 +789,7 @@
       </p:sp>
       <p:sp>
         <p:nvSpPr>
-          <p:cNvPr id="31" name="PlaceHolder 3"/>
+          <p:cNvPr id="912391114" name="PlaceHolder 3"/>
           <p:cNvSpPr>
             <a:spLocks noGrp="1"/>
           </p:cNvSpPr>
@@ -379,7 +797,7 @@
             <p:ph/>
           </p:nvPr>
         </p:nvSpPr>
-        <p:spPr>
+        <p:spPr bwMode="auto">
           <a:xfrm>
             <a:off x="4674240" y="1600200"/>
             <a:ext cx="4015800" cy="2158560"/>
@@ -398,6 +816,9 @@
           </a:bodyPr>
           <a:lstStyle/>
           <a:p>
+            <a:pPr>
+              <a:defRPr/>
+            </a:pPr>
             <a:endParaRPr lang="en-US" sz="3200" b="0" strike="noStrike" spc="-1">
               <a:solidFill>
                 <a:srgbClr val="000000"/>
@@ -409,7 +830,7 @@
       </p:sp>
       <p:sp>
         <p:nvSpPr>
-          <p:cNvPr id="32" name="PlaceHolder 4"/>
+          <p:cNvPr id="263493256" name="PlaceHolder 4"/>
           <p:cNvSpPr>
             <a:spLocks noGrp="1"/>
           </p:cNvSpPr>
@@ -417,7 +838,7 @@
             <p:ph/>
           </p:nvPr>
         </p:nvSpPr>
-        <p:spPr>
+        <p:spPr bwMode="auto">
           <a:xfrm>
             <a:off x="457200" y="3964320"/>
             <a:ext cx="4015800" cy="2158560"/>
@@ -436,6 +857,9 @@
           </a:bodyPr>
           <a:lstStyle/>
           <a:p>
+            <a:pPr>
+              <a:defRPr/>
+            </a:pPr>
             <a:endParaRPr lang="en-US" sz="3200" b="0" strike="noStrike" spc="-1">
               <a:solidFill>
                 <a:srgbClr val="000000"/>
@@ -447,7 +871,7 @@
       </p:sp>
       <p:sp>
         <p:nvSpPr>
-          <p:cNvPr id="33" name="PlaceHolder 5"/>
+          <p:cNvPr id="2096399248" name="PlaceHolder 5"/>
           <p:cNvSpPr>
             <a:spLocks noGrp="1"/>
           </p:cNvSpPr>
@@ -455,7 +879,7 @@
             <p:ph/>
           </p:nvPr>
         </p:nvSpPr>
-        <p:spPr>
+        <p:spPr bwMode="auto">
           <a:xfrm>
             <a:off x="4674240" y="3964320"/>
             <a:ext cx="4015800" cy="2158560"/>
@@ -474,6 +898,9 @@
           </a:bodyPr>
           <a:lstStyle/>
           <a:p>
+            <a:pPr>
+              <a:defRPr/>
+            </a:pPr>
             <a:endParaRPr lang="en-US" sz="3200" b="0" strike="noStrike" spc="-1">
               <a:solidFill>
                 <a:srgbClr val="000000"/>
@@ -492,7 +919,7 @@
 </file>
 
 <file path=ppt/slideLayouts/slideLayout12.xml><?xml version="1.0" encoding="utf-8"?>
-<p:sldLayout xmlns:a="http://schemas.openxmlformats.org/drawingml/2006/main" xmlns:r="http://schemas.openxmlformats.org/officeDocument/2006/relationships" xmlns:p="http://schemas.openxmlformats.org/presentationml/2006/main" type="blank" preserve="1">
+<p:sldLayout xmlns:a="http://schemas.openxmlformats.org/drawingml/2006/main" xmlns:r="http://schemas.openxmlformats.org/officeDocument/2006/relationships" xmlns:p="http://schemas.openxmlformats.org/presentationml/2006/main" xmlns:m="http://schemas.openxmlformats.org/officeDocument/2006/math" xmlns:w="http://schemas.openxmlformats.org/wordprocessingml/2006/main" matchingName="" preserve="1" showMasterPhAnim="0" showMasterSp="1" type="blank" userDrawn="1">
   <p:cSld name="Title, 6 Content">
     <p:spTree>
       <p:nvGrpSpPr>
@@ -500,7 +927,7 @@
         <p:cNvGrpSpPr/>
         <p:nvPr/>
       </p:nvGrpSpPr>
-      <p:grpSpPr>
+      <p:grpSpPr bwMode="auto">
         <a:xfrm>
           <a:off x="0" y="0"/>
           <a:ext cx="0" cy="0"/>
@@ -510,7 +937,7 @@
       </p:grpSpPr>
       <p:sp>
         <p:nvSpPr>
-          <p:cNvPr id="34" name="PlaceHolder 1"/>
+          <p:cNvPr id="1608711317" name="PlaceHolder 1"/>
           <p:cNvSpPr>
             <a:spLocks noGrp="1"/>
           </p:cNvSpPr>
@@ -518,7 +945,7 @@
             <p:ph type="title"/>
           </p:nvPr>
         </p:nvSpPr>
-        <p:spPr>
+        <p:spPr bwMode="auto">
           <a:xfrm>
             <a:off x="457200" y="274680"/>
             <a:ext cx="8229240" cy="1142640"/>
@@ -537,6 +964,9 @@
           </a:bodyPr>
           <a:lstStyle/>
           <a:p>
+            <a:pPr>
+              <a:defRPr/>
+            </a:pPr>
             <a:endParaRPr lang="en-US" sz="1800" b="0" strike="noStrike" spc="-1">
               <a:solidFill>
                 <a:srgbClr val="000000"/>
@@ -548,7 +978,7 @@
       </p:sp>
       <p:sp>
         <p:nvSpPr>
-          <p:cNvPr id="35" name="PlaceHolder 2"/>
+          <p:cNvPr id="1791537752" name="PlaceHolder 2"/>
           <p:cNvSpPr>
             <a:spLocks noGrp="1"/>
           </p:cNvSpPr>
@@ -556,7 +986,7 @@
             <p:ph/>
           </p:nvPr>
         </p:nvSpPr>
-        <p:spPr>
+        <p:spPr bwMode="auto">
           <a:xfrm>
             <a:off x="457200" y="1600200"/>
             <a:ext cx="2649600" cy="2158560"/>
@@ -575,6 +1005,9 @@
           </a:bodyPr>
           <a:lstStyle/>
           <a:p>
+            <a:pPr>
+              <a:defRPr/>
+            </a:pPr>
             <a:endParaRPr lang="en-US" sz="3200" b="0" strike="noStrike" spc="-1">
               <a:solidFill>
                 <a:srgbClr val="000000"/>
@@ -586,7 +1019,7 @@
       </p:sp>
       <p:sp>
         <p:nvSpPr>
-          <p:cNvPr id="36" name="PlaceHolder 3"/>
+          <p:cNvPr id="357914612" name="PlaceHolder 3"/>
           <p:cNvSpPr>
             <a:spLocks noGrp="1"/>
           </p:cNvSpPr>
@@ -594,7 +1027,7 @@
             <p:ph/>
           </p:nvPr>
         </p:nvSpPr>
-        <p:spPr>
+        <p:spPr bwMode="auto">
           <a:xfrm>
             <a:off x="3239640" y="1600200"/>
             <a:ext cx="2649600" cy="2158560"/>
@@ -613,6 +1046,9 @@
           </a:bodyPr>
           <a:lstStyle/>
           <a:p>
+            <a:pPr>
+              <a:defRPr/>
+            </a:pPr>
             <a:endParaRPr lang="en-US" sz="3200" b="0" strike="noStrike" spc="-1">
               <a:solidFill>
                 <a:srgbClr val="000000"/>
@@ -624,7 +1060,7 @@
       </p:sp>
       <p:sp>
         <p:nvSpPr>
-          <p:cNvPr id="37" name="PlaceHolder 4"/>
+          <p:cNvPr id="49403892" name="PlaceHolder 4"/>
           <p:cNvSpPr>
             <a:spLocks noGrp="1"/>
           </p:cNvSpPr>
@@ -632,7 +1068,7 @@
             <p:ph/>
           </p:nvPr>
         </p:nvSpPr>
-        <p:spPr>
+        <p:spPr bwMode="auto">
           <a:xfrm>
             <a:off x="6022080" y="1600200"/>
             <a:ext cx="2649600" cy="2158560"/>
@@ -651,6 +1087,9 @@
           </a:bodyPr>
           <a:lstStyle/>
           <a:p>
+            <a:pPr>
+              <a:defRPr/>
+            </a:pPr>
             <a:endParaRPr lang="en-US" sz="3200" b="0" strike="noStrike" spc="-1">
               <a:solidFill>
                 <a:srgbClr val="000000"/>
@@ -662,7 +1101,7 @@
       </p:sp>
       <p:sp>
         <p:nvSpPr>
-          <p:cNvPr id="38" name="PlaceHolder 5"/>
+          <p:cNvPr id="429336654" name="PlaceHolder 5"/>
           <p:cNvSpPr>
             <a:spLocks noGrp="1"/>
           </p:cNvSpPr>
@@ -670,7 +1109,7 @@
             <p:ph/>
           </p:nvPr>
         </p:nvSpPr>
-        <p:spPr>
+        <p:spPr bwMode="auto">
           <a:xfrm>
             <a:off x="457200" y="3964320"/>
             <a:ext cx="2649600" cy="2158560"/>
@@ -689,6 +1128,9 @@
           </a:bodyPr>
           <a:lstStyle/>
           <a:p>
+            <a:pPr>
+              <a:defRPr/>
+            </a:pPr>
             <a:endParaRPr lang="en-US" sz="3200" b="0" strike="noStrike" spc="-1">
               <a:solidFill>
                 <a:srgbClr val="000000"/>
@@ -700,7 +1142,7 @@
       </p:sp>
       <p:sp>
         <p:nvSpPr>
-          <p:cNvPr id="39" name="PlaceHolder 6"/>
+          <p:cNvPr id="862362306" name="PlaceHolder 6"/>
           <p:cNvSpPr>
             <a:spLocks noGrp="1"/>
           </p:cNvSpPr>
@@ -708,7 +1150,7 @@
             <p:ph/>
           </p:nvPr>
         </p:nvSpPr>
-        <p:spPr>
+        <p:spPr bwMode="auto">
           <a:xfrm>
             <a:off x="3239640" y="3964320"/>
             <a:ext cx="2649600" cy="2158560"/>
@@ -727,6 +1169,9 @@
           </a:bodyPr>
           <a:lstStyle/>
           <a:p>
+            <a:pPr>
+              <a:defRPr/>
+            </a:pPr>
             <a:endParaRPr lang="en-US" sz="3200" b="0" strike="noStrike" spc="-1">
               <a:solidFill>
                 <a:srgbClr val="000000"/>
@@ -738,7 +1183,7 @@
       </p:sp>
       <p:sp>
         <p:nvSpPr>
-          <p:cNvPr id="40" name="PlaceHolder 7"/>
+          <p:cNvPr id="2134564631" name="PlaceHolder 7"/>
           <p:cNvSpPr>
             <a:spLocks noGrp="1"/>
           </p:cNvSpPr>
@@ -746,7 +1191,7 @@
             <p:ph/>
           </p:nvPr>
         </p:nvSpPr>
-        <p:spPr>
+        <p:spPr bwMode="auto">
           <a:xfrm>
             <a:off x="6022080" y="3964320"/>
             <a:ext cx="2649600" cy="2158560"/>
@@ -765,6 +1210,9 @@
           </a:bodyPr>
           <a:lstStyle/>
           <a:p>
+            <a:pPr>
+              <a:defRPr/>
+            </a:pPr>
             <a:endParaRPr lang="en-US" sz="3200" b="0" strike="noStrike" spc="-1">
               <a:solidFill>
                 <a:srgbClr val="000000"/>
@@ -783,7 +1231,7 @@
 </file>
 
 <file path=ppt/slideLayouts/slideLayout2.xml><?xml version="1.0" encoding="utf-8"?>
-<p:sldLayout xmlns:a="http://schemas.openxmlformats.org/drawingml/2006/main" xmlns:r="http://schemas.openxmlformats.org/officeDocument/2006/relationships" xmlns:p="http://schemas.openxmlformats.org/presentationml/2006/main" type="tx" preserve="1">
+<p:sldLayout xmlns:a="http://schemas.openxmlformats.org/drawingml/2006/main" xmlns:r="http://schemas.openxmlformats.org/officeDocument/2006/relationships" xmlns:p="http://schemas.openxmlformats.org/presentationml/2006/main" xmlns:m="http://schemas.openxmlformats.org/officeDocument/2006/math" xmlns:w="http://schemas.openxmlformats.org/wordprocessingml/2006/main" matchingName="" preserve="1" showMasterPhAnim="0" showMasterSp="1" type="tx" userDrawn="1">
   <p:cSld name="Title Slide">
     <p:spTree>
       <p:nvGrpSpPr>
@@ -791,7 +1239,7 @@
         <p:cNvGrpSpPr/>
         <p:nvPr/>
       </p:nvGrpSpPr>
-      <p:grpSpPr>
+      <p:grpSpPr bwMode="auto">
         <a:xfrm>
           <a:off x="0" y="0"/>
           <a:ext cx="0" cy="0"/>
@@ -801,7 +1249,7 @@
       </p:grpSpPr>
       <p:sp>
         <p:nvSpPr>
-          <p:cNvPr id="5" name="PlaceHolder 1"/>
+          <p:cNvPr id="806578079" name="PlaceHolder 1"/>
           <p:cNvSpPr>
             <a:spLocks noGrp="1"/>
           </p:cNvSpPr>
@@ -809,7 +1257,7 @@
             <p:ph type="title"/>
           </p:nvPr>
         </p:nvSpPr>
-        <p:spPr>
+        <p:spPr bwMode="auto">
           <a:xfrm>
             <a:off x="457200" y="274680"/>
             <a:ext cx="8229240" cy="1142640"/>
@@ -828,6 +1276,9 @@
           </a:bodyPr>
           <a:lstStyle/>
           <a:p>
+            <a:pPr>
+              <a:defRPr/>
+            </a:pPr>
             <a:endParaRPr lang="en-US" sz="1800" b="0" strike="noStrike" spc="-1">
               <a:solidFill>
                 <a:srgbClr val="000000"/>
@@ -839,7 +1290,7 @@
       </p:sp>
       <p:sp>
         <p:nvSpPr>
-          <p:cNvPr id="6" name="PlaceHolder 2"/>
+          <p:cNvPr id="1504395537" name="PlaceHolder 2"/>
           <p:cNvSpPr>
             <a:spLocks noGrp="1"/>
           </p:cNvSpPr>
@@ -847,7 +1298,7 @@
             <p:ph type="subTitle"/>
           </p:nvPr>
         </p:nvSpPr>
-        <p:spPr>
+        <p:spPr bwMode="auto">
           <a:xfrm>
             <a:off x="457200" y="1600200"/>
             <a:ext cx="8229240" cy="4525560"/>
@@ -866,7 +1317,9 @@
           </a:bodyPr>
           <a:lstStyle/>
           <a:p>
-            <a:pPr algn="ctr"/>
+            <a:pPr algn="ctr">
+              <a:defRPr/>
+            </a:pPr>
             <a:endParaRPr lang="en-US" sz="3200" b="0" strike="noStrike" spc="-1">
               <a:latin typeface="Arial"/>
             </a:endParaRPr>
@@ -882,7 +1335,7 @@
 </file>
 
 <file path=ppt/slideLayouts/slideLayout3.xml><?xml version="1.0" encoding="utf-8"?>
-<p:sldLayout xmlns:a="http://schemas.openxmlformats.org/drawingml/2006/main" xmlns:r="http://schemas.openxmlformats.org/officeDocument/2006/relationships" xmlns:p="http://schemas.openxmlformats.org/presentationml/2006/main" type="obj" preserve="1">
+<p:sldLayout xmlns:a="http://schemas.openxmlformats.org/drawingml/2006/main" xmlns:r="http://schemas.openxmlformats.org/officeDocument/2006/relationships" xmlns:p="http://schemas.openxmlformats.org/presentationml/2006/main" xmlns:m="http://schemas.openxmlformats.org/officeDocument/2006/math" xmlns:w="http://schemas.openxmlformats.org/wordprocessingml/2006/main" matchingName="" preserve="1" showMasterPhAnim="0" showMasterSp="1" type="obj" userDrawn="1">
   <p:cSld name="Title, Content">
     <p:spTree>
       <p:nvGrpSpPr>
@@ -890,7 +1343,7 @@
         <p:cNvGrpSpPr/>
         <p:nvPr/>
       </p:nvGrpSpPr>
-      <p:grpSpPr>
+      <p:grpSpPr bwMode="auto">
         <a:xfrm>
           <a:off x="0" y="0"/>
           <a:ext cx="0" cy="0"/>
@@ -900,7 +1353,7 @@
       </p:grpSpPr>
       <p:sp>
         <p:nvSpPr>
-          <p:cNvPr id="7" name="PlaceHolder 1"/>
+          <p:cNvPr id="1767377562" name="PlaceHolder 1"/>
           <p:cNvSpPr>
             <a:spLocks noGrp="1"/>
           </p:cNvSpPr>
@@ -908,7 +1361,7 @@
             <p:ph type="title"/>
           </p:nvPr>
         </p:nvSpPr>
-        <p:spPr>
+        <p:spPr bwMode="auto">
           <a:xfrm>
             <a:off x="457200" y="274680"/>
             <a:ext cx="8229240" cy="1142640"/>
@@ -927,6 +1380,9 @@
           </a:bodyPr>
           <a:lstStyle/>
           <a:p>
+            <a:pPr>
+              <a:defRPr/>
+            </a:pPr>
             <a:endParaRPr lang="en-US" sz="1800" b="0" strike="noStrike" spc="-1">
               <a:solidFill>
                 <a:srgbClr val="000000"/>
@@ -938,7 +1394,7 @@
       </p:sp>
       <p:sp>
         <p:nvSpPr>
-          <p:cNvPr id="8" name="PlaceHolder 2"/>
+          <p:cNvPr id="1332178642" name="PlaceHolder 2"/>
           <p:cNvSpPr>
             <a:spLocks noGrp="1"/>
           </p:cNvSpPr>
@@ -946,7 +1402,7 @@
             <p:ph/>
           </p:nvPr>
         </p:nvSpPr>
-        <p:spPr>
+        <p:spPr bwMode="auto">
           <a:xfrm>
             <a:off x="457200" y="1600200"/>
             <a:ext cx="8229240" cy="4525560"/>
@@ -965,6 +1421,9 @@
           </a:bodyPr>
           <a:lstStyle/>
           <a:p>
+            <a:pPr>
+              <a:defRPr/>
+            </a:pPr>
             <a:endParaRPr lang="en-US" sz="3200" b="0" strike="noStrike" spc="-1">
               <a:solidFill>
                 <a:srgbClr val="000000"/>
@@ -983,7 +1442,7 @@
 </file>
 
 <file path=ppt/slideLayouts/slideLayout4.xml><?xml version="1.0" encoding="utf-8"?>
-<p:sldLayout xmlns:a="http://schemas.openxmlformats.org/drawingml/2006/main" xmlns:r="http://schemas.openxmlformats.org/officeDocument/2006/relationships" xmlns:p="http://schemas.openxmlformats.org/presentationml/2006/main" type="twoObj" preserve="1">
+<p:sldLayout xmlns:a="http://schemas.openxmlformats.org/drawingml/2006/main" xmlns:r="http://schemas.openxmlformats.org/officeDocument/2006/relationships" xmlns:p="http://schemas.openxmlformats.org/presentationml/2006/main" xmlns:m="http://schemas.openxmlformats.org/officeDocument/2006/math" xmlns:w="http://schemas.openxmlformats.org/wordprocessingml/2006/main" matchingName="" preserve="1" showMasterPhAnim="0" showMasterSp="1" type="twoObj" userDrawn="1">
   <p:cSld name="Title, 2 Content">
     <p:spTree>
       <p:nvGrpSpPr>
@@ -991,7 +1450,7 @@
         <p:cNvGrpSpPr/>
         <p:nvPr/>
       </p:nvGrpSpPr>
-      <p:grpSpPr>
+      <p:grpSpPr bwMode="auto">
         <a:xfrm>
           <a:off x="0" y="0"/>
           <a:ext cx="0" cy="0"/>
@@ -1001,7 +1460,7 @@
       </p:grpSpPr>
       <p:sp>
         <p:nvSpPr>
-          <p:cNvPr id="9" name="PlaceHolder 1"/>
+          <p:cNvPr id="1769357888" name="PlaceHolder 1"/>
           <p:cNvSpPr>
             <a:spLocks noGrp="1"/>
           </p:cNvSpPr>
@@ -1009,7 +1468,7 @@
             <p:ph type="title"/>
           </p:nvPr>
         </p:nvSpPr>
-        <p:spPr>
+        <p:spPr bwMode="auto">
           <a:xfrm>
             <a:off x="457200" y="274680"/>
             <a:ext cx="8229240" cy="1142640"/>
@@ -1028,6 +1487,9 @@
           </a:bodyPr>
           <a:lstStyle/>
           <a:p>
+            <a:pPr>
+              <a:defRPr/>
+            </a:pPr>
             <a:endParaRPr lang="en-US" sz="1800" b="0" strike="noStrike" spc="-1">
               <a:solidFill>
                 <a:srgbClr val="000000"/>
@@ -1039,7 +1501,7 @@
       </p:sp>
       <p:sp>
         <p:nvSpPr>
-          <p:cNvPr id="10" name="PlaceHolder 2"/>
+          <p:cNvPr id="867415110" name="PlaceHolder 2"/>
           <p:cNvSpPr>
             <a:spLocks noGrp="1"/>
           </p:cNvSpPr>
@@ -1047,7 +1509,7 @@
             <p:ph/>
           </p:nvPr>
         </p:nvSpPr>
-        <p:spPr>
+        <p:spPr bwMode="auto">
           <a:xfrm>
             <a:off x="457200" y="1600200"/>
             <a:ext cx="4015800" cy="4525560"/>
@@ -1066,6 +1528,9 @@
           </a:bodyPr>
           <a:lstStyle/>
           <a:p>
+            <a:pPr>
+              <a:defRPr/>
+            </a:pPr>
             <a:endParaRPr lang="en-US" sz="3200" b="0" strike="noStrike" spc="-1">
               <a:solidFill>
                 <a:srgbClr val="000000"/>
@@ -1077,7 +1542,7 @@
       </p:sp>
       <p:sp>
         <p:nvSpPr>
-          <p:cNvPr id="11" name="PlaceHolder 3"/>
+          <p:cNvPr id="1254736847" name="PlaceHolder 3"/>
           <p:cNvSpPr>
             <a:spLocks noGrp="1"/>
           </p:cNvSpPr>
@@ -1085,7 +1550,7 @@
             <p:ph/>
           </p:nvPr>
         </p:nvSpPr>
-        <p:spPr>
+        <p:spPr bwMode="auto">
           <a:xfrm>
             <a:off x="4674240" y="1600200"/>
             <a:ext cx="4015800" cy="4525560"/>
@@ -1104,6 +1569,9 @@
           </a:bodyPr>
           <a:lstStyle/>
           <a:p>
+            <a:pPr>
+              <a:defRPr/>
+            </a:pPr>
             <a:endParaRPr lang="en-US" sz="3200" b="0" strike="noStrike" spc="-1">
               <a:solidFill>
                 <a:srgbClr val="000000"/>
@@ -1122,7 +1590,7 @@
 </file>
 
 <file path=ppt/slideLayouts/slideLayout5.xml><?xml version="1.0" encoding="utf-8"?>
-<p:sldLayout xmlns:a="http://schemas.openxmlformats.org/drawingml/2006/main" xmlns:r="http://schemas.openxmlformats.org/officeDocument/2006/relationships" xmlns:p="http://schemas.openxmlformats.org/presentationml/2006/main" type="titleOnly" preserve="1">
+<p:sldLayout xmlns:a="http://schemas.openxmlformats.org/drawingml/2006/main" xmlns:r="http://schemas.openxmlformats.org/officeDocument/2006/relationships" xmlns:p="http://schemas.openxmlformats.org/presentationml/2006/main" xmlns:m="http://schemas.openxmlformats.org/officeDocument/2006/math" xmlns:w="http://schemas.openxmlformats.org/wordprocessingml/2006/main" matchingName="" preserve="1" showMasterPhAnim="0" showMasterSp="1" type="titleOnly" userDrawn="1">
   <p:cSld name="Title Only">
     <p:spTree>
       <p:nvGrpSpPr>
@@ -1130,7 +1598,7 @@
         <p:cNvGrpSpPr/>
         <p:nvPr/>
       </p:nvGrpSpPr>
-      <p:grpSpPr>
+      <p:grpSpPr bwMode="auto">
         <a:xfrm>
           <a:off x="0" y="0"/>
           <a:ext cx="0" cy="0"/>
@@ -1140,7 +1608,7 @@
       </p:grpSpPr>
       <p:sp>
         <p:nvSpPr>
-          <p:cNvPr id="12" name="PlaceHolder 1"/>
+          <p:cNvPr id="1645649532" name="PlaceHolder 1"/>
           <p:cNvSpPr>
             <a:spLocks noGrp="1"/>
           </p:cNvSpPr>
@@ -1148,7 +1616,7 @@
             <p:ph type="title"/>
           </p:nvPr>
         </p:nvSpPr>
-        <p:spPr>
+        <p:spPr bwMode="auto">
           <a:xfrm>
             <a:off x="457200" y="274680"/>
             <a:ext cx="8229240" cy="1142640"/>
@@ -1167,6 +1635,9 @@
           </a:bodyPr>
           <a:lstStyle/>
           <a:p>
+            <a:pPr>
+              <a:defRPr/>
+            </a:pPr>
             <a:endParaRPr lang="en-US" sz="1800" b="0" strike="noStrike" spc="-1">
               <a:solidFill>
                 <a:srgbClr val="000000"/>
@@ -1185,7 +1656,7 @@
 </file>
 
 <file path=ppt/slideLayouts/slideLayout6.xml><?xml version="1.0" encoding="utf-8"?>
-<p:sldLayout xmlns:a="http://schemas.openxmlformats.org/drawingml/2006/main" xmlns:r="http://schemas.openxmlformats.org/officeDocument/2006/relationships" xmlns:p="http://schemas.openxmlformats.org/presentationml/2006/main" type="objOnly" preserve="1">
+<p:sldLayout xmlns:a="http://schemas.openxmlformats.org/drawingml/2006/main" xmlns:r="http://schemas.openxmlformats.org/officeDocument/2006/relationships" xmlns:p="http://schemas.openxmlformats.org/presentationml/2006/main" xmlns:m="http://schemas.openxmlformats.org/officeDocument/2006/math" xmlns:w="http://schemas.openxmlformats.org/wordprocessingml/2006/main" matchingName="" preserve="1" showMasterPhAnim="0" showMasterSp="1" type="objOnly" userDrawn="1">
   <p:cSld name="Centered Text">
     <p:spTree>
       <p:nvGrpSpPr>
@@ -1193,7 +1664,7 @@
         <p:cNvGrpSpPr/>
         <p:nvPr/>
       </p:nvGrpSpPr>
-      <p:grpSpPr>
+      <p:grpSpPr bwMode="auto">
         <a:xfrm>
           <a:off x="0" y="0"/>
           <a:ext cx="0" cy="0"/>
@@ -1203,7 +1674,7 @@
       </p:grpSpPr>
       <p:sp>
         <p:nvSpPr>
-          <p:cNvPr id="13" name="PlaceHolder 1"/>
+          <p:cNvPr id="444390447" name="PlaceHolder 1"/>
           <p:cNvSpPr>
             <a:spLocks noGrp="1"/>
           </p:cNvSpPr>
@@ -1211,7 +1682,7 @@
             <p:ph type="subTitle"/>
           </p:nvPr>
         </p:nvSpPr>
-        <p:spPr>
+        <p:spPr bwMode="auto">
           <a:xfrm>
             <a:off x="457200" y="274680"/>
             <a:ext cx="8229240" cy="5297760"/>
@@ -1230,7 +1701,9 @@
           </a:bodyPr>
           <a:lstStyle/>
           <a:p>
-            <a:pPr algn="ctr"/>
+            <a:pPr algn="ctr">
+              <a:defRPr/>
+            </a:pPr>
             <a:endParaRPr lang="en-US" sz="3200" b="0" strike="noStrike" spc="-1">
               <a:latin typeface="Arial"/>
             </a:endParaRPr>
@@ -1246,7 +1719,7 @@
 </file>
 
 <file path=ppt/slideLayouts/slideLayout7.xml><?xml version="1.0" encoding="utf-8"?>
-<p:sldLayout xmlns:a="http://schemas.openxmlformats.org/drawingml/2006/main" xmlns:r="http://schemas.openxmlformats.org/officeDocument/2006/relationships" xmlns:p="http://schemas.openxmlformats.org/presentationml/2006/main" type="twoObjAndObj" preserve="1">
+<p:sldLayout xmlns:a="http://schemas.openxmlformats.org/drawingml/2006/main" xmlns:r="http://schemas.openxmlformats.org/officeDocument/2006/relationships" xmlns:p="http://schemas.openxmlformats.org/presentationml/2006/main" xmlns:m="http://schemas.openxmlformats.org/officeDocument/2006/math" xmlns:w="http://schemas.openxmlformats.org/wordprocessingml/2006/main" matchingName="" preserve="1" showMasterPhAnim="0" showMasterSp="1" type="twoObjAndObj" userDrawn="1">
   <p:cSld name="Title, 2 Content and Content">
     <p:spTree>
       <p:nvGrpSpPr>
@@ -1254,7 +1727,7 @@
         <p:cNvGrpSpPr/>
         <p:nvPr/>
       </p:nvGrpSpPr>
-      <p:grpSpPr>
+      <p:grpSpPr bwMode="auto">
         <a:xfrm>
           <a:off x="0" y="0"/>
           <a:ext cx="0" cy="0"/>
@@ -1264,7 +1737,7 @@
       </p:grpSpPr>
       <p:sp>
         <p:nvSpPr>
-          <p:cNvPr id="14" name="PlaceHolder 1"/>
+          <p:cNvPr id="411198808" name="PlaceHolder 1"/>
           <p:cNvSpPr>
             <a:spLocks noGrp="1"/>
           </p:cNvSpPr>
@@ -1272,7 +1745,7 @@
             <p:ph type="title"/>
           </p:nvPr>
         </p:nvSpPr>
-        <p:spPr>
+        <p:spPr bwMode="auto">
           <a:xfrm>
             <a:off x="457200" y="274680"/>
             <a:ext cx="8229240" cy="1142640"/>
@@ -1291,6 +1764,9 @@
           </a:bodyPr>
           <a:lstStyle/>
           <a:p>
+            <a:pPr>
+              <a:defRPr/>
+            </a:pPr>
             <a:endParaRPr lang="en-US" sz="1800" b="0" strike="noStrike" spc="-1">
               <a:solidFill>
                 <a:srgbClr val="000000"/>
@@ -1302,7 +1778,7 @@
       </p:sp>
       <p:sp>
         <p:nvSpPr>
-          <p:cNvPr id="15" name="PlaceHolder 2"/>
+          <p:cNvPr id="795747576" name="PlaceHolder 2"/>
           <p:cNvSpPr>
             <a:spLocks noGrp="1"/>
           </p:cNvSpPr>
@@ -1310,7 +1786,7 @@
             <p:ph/>
           </p:nvPr>
         </p:nvSpPr>
-        <p:spPr>
+        <p:spPr bwMode="auto">
           <a:xfrm>
             <a:off x="457200" y="1600200"/>
             <a:ext cx="4015800" cy="2158560"/>
@@ -1329,6 +1805,9 @@
           </a:bodyPr>
           <a:lstStyle/>
           <a:p>
+            <a:pPr>
+              <a:defRPr/>
+            </a:pPr>
             <a:endParaRPr lang="en-US" sz="3200" b="0" strike="noStrike" spc="-1">
               <a:solidFill>
                 <a:srgbClr val="000000"/>
@@ -1340,7 +1819,7 @@
       </p:sp>
       <p:sp>
         <p:nvSpPr>
-          <p:cNvPr id="16" name="PlaceHolder 3"/>
+          <p:cNvPr id="1255484032" name="PlaceHolder 3"/>
           <p:cNvSpPr>
             <a:spLocks noGrp="1"/>
           </p:cNvSpPr>
@@ -1348,7 +1827,7 @@
             <p:ph/>
           </p:nvPr>
         </p:nvSpPr>
-        <p:spPr>
+        <p:spPr bwMode="auto">
           <a:xfrm>
             <a:off x="4674240" y="1600200"/>
             <a:ext cx="4015800" cy="4525560"/>
@@ -1367,6 +1846,9 @@
           </a:bodyPr>
           <a:lstStyle/>
           <a:p>
+            <a:pPr>
+              <a:defRPr/>
+            </a:pPr>
             <a:endParaRPr lang="en-US" sz="3200" b="0" strike="noStrike" spc="-1">
               <a:solidFill>
                 <a:srgbClr val="000000"/>
@@ -1378,7 +1860,7 @@
       </p:sp>
       <p:sp>
         <p:nvSpPr>
-          <p:cNvPr id="17" name="PlaceHolder 4"/>
+          <p:cNvPr id="670200519" name="PlaceHolder 4"/>
           <p:cNvSpPr>
             <a:spLocks noGrp="1"/>
           </p:cNvSpPr>
@@ -1386,7 +1868,7 @@
             <p:ph/>
           </p:nvPr>
         </p:nvSpPr>
-        <p:spPr>
+        <p:spPr bwMode="auto">
           <a:xfrm>
             <a:off x="457200" y="3964320"/>
             <a:ext cx="4015800" cy="2158560"/>
@@ -1405,6 +1887,9 @@
           </a:bodyPr>
           <a:lstStyle/>
           <a:p>
+            <a:pPr>
+              <a:defRPr/>
+            </a:pPr>
             <a:endParaRPr lang="en-US" sz="3200" b="0" strike="noStrike" spc="-1">
               <a:solidFill>
                 <a:srgbClr val="000000"/>
@@ -1423,7 +1908,7 @@
 </file>
 
 <file path=ppt/slideLayouts/slideLayout8.xml><?xml version="1.0" encoding="utf-8"?>
-<p:sldLayout xmlns:a="http://schemas.openxmlformats.org/drawingml/2006/main" xmlns:r="http://schemas.openxmlformats.org/officeDocument/2006/relationships" xmlns:p="http://schemas.openxmlformats.org/presentationml/2006/main" type="objAndTwoObj" preserve="1">
+<p:sldLayout xmlns:a="http://schemas.openxmlformats.org/drawingml/2006/main" xmlns:r="http://schemas.openxmlformats.org/officeDocument/2006/relationships" xmlns:p="http://schemas.openxmlformats.org/presentationml/2006/main" xmlns:m="http://schemas.openxmlformats.org/officeDocument/2006/math" xmlns:w="http://schemas.openxmlformats.org/wordprocessingml/2006/main" matchingName="" preserve="1" showMasterPhAnim="0" showMasterSp="1" type="objAndTwoObj" userDrawn="1">
   <p:cSld name="Title Content and 2 Content">
     <p:spTree>
       <p:nvGrpSpPr>
@@ -1431,7 +1916,7 @@
         <p:cNvGrpSpPr/>
         <p:nvPr/>
       </p:nvGrpSpPr>
-      <p:grpSpPr>
+      <p:grpSpPr bwMode="auto">
         <a:xfrm>
           <a:off x="0" y="0"/>
           <a:ext cx="0" cy="0"/>
@@ -1441,7 +1926,7 @@
       </p:grpSpPr>
       <p:sp>
         <p:nvSpPr>
-          <p:cNvPr id="18" name="PlaceHolder 1"/>
+          <p:cNvPr id="1206526550" name="PlaceHolder 1"/>
           <p:cNvSpPr>
             <a:spLocks noGrp="1"/>
           </p:cNvSpPr>
@@ -1449,7 +1934,7 @@
             <p:ph type="title"/>
           </p:nvPr>
         </p:nvSpPr>
-        <p:spPr>
+        <p:spPr bwMode="auto">
           <a:xfrm>
             <a:off x="457200" y="274680"/>
             <a:ext cx="8229240" cy="1142640"/>
@@ -1468,6 +1953,9 @@
           </a:bodyPr>
           <a:lstStyle/>
           <a:p>
+            <a:pPr>
+              <a:defRPr/>
+            </a:pPr>
             <a:endParaRPr lang="en-US" sz="1800" b="0" strike="noStrike" spc="-1">
               <a:solidFill>
                 <a:srgbClr val="000000"/>
@@ -1479,7 +1967,7 @@
       </p:sp>
       <p:sp>
         <p:nvSpPr>
-          <p:cNvPr id="19" name="PlaceHolder 2"/>
+          <p:cNvPr id="267377170" name="PlaceHolder 2"/>
           <p:cNvSpPr>
             <a:spLocks noGrp="1"/>
           </p:cNvSpPr>
@@ -1487,7 +1975,7 @@
             <p:ph/>
           </p:nvPr>
         </p:nvSpPr>
-        <p:spPr>
+        <p:spPr bwMode="auto">
           <a:xfrm>
             <a:off x="457200" y="1600200"/>
             <a:ext cx="4015800" cy="4525560"/>
@@ -1506,6 +1994,9 @@
           </a:bodyPr>
           <a:lstStyle/>
           <a:p>
+            <a:pPr>
+              <a:defRPr/>
+            </a:pPr>
             <a:endParaRPr lang="en-US" sz="3200" b="0" strike="noStrike" spc="-1">
               <a:solidFill>
                 <a:srgbClr val="000000"/>
@@ -1517,7 +2008,7 @@
       </p:sp>
       <p:sp>
         <p:nvSpPr>
-          <p:cNvPr id="20" name="PlaceHolder 3"/>
+          <p:cNvPr id="1401475744" name="PlaceHolder 3"/>
           <p:cNvSpPr>
             <a:spLocks noGrp="1"/>
           </p:cNvSpPr>
@@ -1525,7 +2016,7 @@
             <p:ph/>
           </p:nvPr>
         </p:nvSpPr>
-        <p:spPr>
+        <p:spPr bwMode="auto">
           <a:xfrm>
             <a:off x="4674240" y="1600200"/>
             <a:ext cx="4015800" cy="2158560"/>
@@ -1544,6 +2035,9 @@
           </a:bodyPr>
           <a:lstStyle/>
           <a:p>
+            <a:pPr>
+              <a:defRPr/>
+            </a:pPr>
             <a:endParaRPr lang="en-US" sz="3200" b="0" strike="noStrike" spc="-1">
               <a:solidFill>
                 <a:srgbClr val="000000"/>
@@ -1555,7 +2049,7 @@
       </p:sp>
       <p:sp>
         <p:nvSpPr>
-          <p:cNvPr id="21" name="PlaceHolder 4"/>
+          <p:cNvPr id="1781509861" name="PlaceHolder 4"/>
           <p:cNvSpPr>
             <a:spLocks noGrp="1"/>
           </p:cNvSpPr>
@@ -1563,7 +2057,7 @@
             <p:ph/>
           </p:nvPr>
         </p:nvSpPr>
-        <p:spPr>
+        <p:spPr bwMode="auto">
           <a:xfrm>
             <a:off x="4674240" y="3964320"/>
             <a:ext cx="4015800" cy="2158560"/>
@@ -1582,6 +2076,9 @@
           </a:bodyPr>
           <a:lstStyle/>
           <a:p>
+            <a:pPr>
+              <a:defRPr/>
+            </a:pPr>
             <a:endParaRPr lang="en-US" sz="3200" b="0" strike="noStrike" spc="-1">
               <a:solidFill>
                 <a:srgbClr val="000000"/>
@@ -1600,7 +2097,7 @@
 </file>
 
 <file path=ppt/slideLayouts/slideLayout9.xml><?xml version="1.0" encoding="utf-8"?>
-<p:sldLayout xmlns:a="http://schemas.openxmlformats.org/drawingml/2006/main" xmlns:r="http://schemas.openxmlformats.org/officeDocument/2006/relationships" xmlns:p="http://schemas.openxmlformats.org/presentationml/2006/main" type="twoObjOverTx" preserve="1">
+<p:sldLayout xmlns:a="http://schemas.openxmlformats.org/drawingml/2006/main" xmlns:r="http://schemas.openxmlformats.org/officeDocument/2006/relationships" xmlns:p="http://schemas.openxmlformats.org/presentationml/2006/main" xmlns:m="http://schemas.openxmlformats.org/officeDocument/2006/math" xmlns:w="http://schemas.openxmlformats.org/wordprocessingml/2006/main" matchingName="" preserve="1" showMasterPhAnim="0" showMasterSp="1" type="twoObjOverTx" userDrawn="1">
   <p:cSld name="Title, 2 Content over Content">
     <p:spTree>
       <p:nvGrpSpPr>
@@ -1608,7 +2105,7 @@
         <p:cNvGrpSpPr/>
         <p:nvPr/>
       </p:nvGrpSpPr>
-      <p:grpSpPr>
+      <p:grpSpPr bwMode="auto">
         <a:xfrm>
           <a:off x="0" y="0"/>
           <a:ext cx="0" cy="0"/>
@@ -1618,7 +2115,7 @@
       </p:grpSpPr>
       <p:sp>
         <p:nvSpPr>
-          <p:cNvPr id="22" name="PlaceHolder 1"/>
+          <p:cNvPr id="594420439" name="PlaceHolder 1"/>
           <p:cNvSpPr>
             <a:spLocks noGrp="1"/>
           </p:cNvSpPr>
@@ -1626,7 +2123,7 @@
             <p:ph type="title"/>
           </p:nvPr>
         </p:nvSpPr>
-        <p:spPr>
+        <p:spPr bwMode="auto">
           <a:xfrm>
             <a:off x="457200" y="274680"/>
             <a:ext cx="8229240" cy="1142640"/>
@@ -1645,6 +2142,9 @@
           </a:bodyPr>
           <a:lstStyle/>
           <a:p>
+            <a:pPr>
+              <a:defRPr/>
+            </a:pPr>
             <a:endParaRPr lang="en-US" sz="1800" b="0" strike="noStrike" spc="-1">
               <a:solidFill>
                 <a:srgbClr val="000000"/>
@@ -1656,7 +2156,7 @@
       </p:sp>
       <p:sp>
         <p:nvSpPr>
-          <p:cNvPr id="23" name="PlaceHolder 2"/>
+          <p:cNvPr id="1783736128" name="PlaceHolder 2"/>
           <p:cNvSpPr>
             <a:spLocks noGrp="1"/>
           </p:cNvSpPr>
@@ -1664,7 +2164,7 @@
             <p:ph/>
           </p:nvPr>
         </p:nvSpPr>
-        <p:spPr>
+        <p:spPr bwMode="auto">
           <a:xfrm>
             <a:off x="457200" y="1600200"/>
             <a:ext cx="4015800" cy="2158560"/>
@@ -1683,6 +2183,9 @@
           </a:bodyPr>
           <a:lstStyle/>
           <a:p>
+            <a:pPr>
+              <a:defRPr/>
+            </a:pPr>
             <a:endParaRPr lang="en-US" sz="3200" b="0" strike="noStrike" spc="-1">
               <a:solidFill>
                 <a:srgbClr val="000000"/>
@@ -1694,7 +2197,7 @@
       </p:sp>
       <p:sp>
         <p:nvSpPr>
-          <p:cNvPr id="24" name="PlaceHolder 3"/>
+          <p:cNvPr id="1126949623" name="PlaceHolder 3"/>
           <p:cNvSpPr>
             <a:spLocks noGrp="1"/>
           </p:cNvSpPr>
@@ -1702,7 +2205,7 @@
             <p:ph/>
           </p:nvPr>
         </p:nvSpPr>
-        <p:spPr>
+        <p:spPr bwMode="auto">
           <a:xfrm>
             <a:off x="4674240" y="1600200"/>
             <a:ext cx="4015800" cy="2158560"/>
@@ -1721,6 +2224,9 @@
           </a:bodyPr>
           <a:lstStyle/>
           <a:p>
+            <a:pPr>
+              <a:defRPr/>
+            </a:pPr>
             <a:endParaRPr lang="en-US" sz="3200" b="0" strike="noStrike" spc="-1">
               <a:solidFill>
                 <a:srgbClr val="000000"/>
@@ -1732,7 +2238,7 @@
       </p:sp>
       <p:sp>
         <p:nvSpPr>
-          <p:cNvPr id="25" name="PlaceHolder 4"/>
+          <p:cNvPr id="1763900408" name="PlaceHolder 4"/>
           <p:cNvSpPr>
             <a:spLocks noGrp="1"/>
           </p:cNvSpPr>
@@ -1740,7 +2246,7 @@
             <p:ph/>
           </p:nvPr>
         </p:nvSpPr>
-        <p:spPr>
+        <p:spPr bwMode="auto">
           <a:xfrm>
             <a:off x="457200" y="3964320"/>
             <a:ext cx="8229240" cy="2158560"/>
@@ -1759,6 +2265,9 @@
           </a:bodyPr>
           <a:lstStyle/>
           <a:p>
+            <a:pPr>
+              <a:defRPr/>
+            </a:pPr>
             <a:endParaRPr lang="en-US" sz="3200" b="0" strike="noStrike" spc="-1">
               <a:solidFill>
                 <a:srgbClr val="000000"/>
@@ -1777,14 +2286,13 @@
 </file>
 
 <file path=ppt/slideMasters/slideMaster1.xml><?xml version="1.0" encoding="utf-8"?>
-<p:sldMaster xmlns:a="http://schemas.openxmlformats.org/drawingml/2006/main" xmlns:r="http://schemas.openxmlformats.org/officeDocument/2006/relationships" xmlns:p="http://schemas.openxmlformats.org/presentationml/2006/main">
-  <p:cSld>
+<p:sldMaster xmlns:a="http://schemas.openxmlformats.org/drawingml/2006/main" xmlns:r="http://schemas.openxmlformats.org/officeDocument/2006/relationships" xmlns:p="http://schemas.openxmlformats.org/presentationml/2006/main" xmlns:m="http://schemas.openxmlformats.org/officeDocument/2006/math" xmlns:w="http://schemas.openxmlformats.org/wordprocessingml/2006/main" preserve="0">
+  <p:cSld name="">
     <p:bg>
-      <p:bgPr>
+      <p:bgPr shadeToTitle="0">
         <a:solidFill>
           <a:srgbClr val="FFFFFF"/>
         </a:solidFill>
-        <a:effectLst/>
       </p:bgPr>
     </p:bg>
     <p:spTree>
@@ -1793,7 +2301,7 @@
         <p:cNvGrpSpPr/>
         <p:nvPr/>
       </p:nvGrpSpPr>
-      <p:grpSpPr>
+      <p:grpSpPr bwMode="auto">
         <a:xfrm>
           <a:off x="0" y="0"/>
           <a:ext cx="0" cy="0"/>
@@ -1803,7 +2311,7 @@
       </p:grpSpPr>
       <p:sp>
         <p:nvSpPr>
-          <p:cNvPr id="5" name="PlaceHolder 1"/>
+          <p:cNvPr id="151861445" name="PlaceHolder 1"/>
           <p:cNvSpPr>
             <a:spLocks noGrp="1"/>
           </p:cNvSpPr>
@@ -1811,7 +2319,7 @@
             <p:ph type="title"/>
           </p:nvPr>
         </p:nvSpPr>
-        <p:spPr>
+        <p:spPr bwMode="auto">
           <a:xfrm>
             <a:off x="457200" y="274680"/>
             <a:ext cx="8229240" cy="1142640"/>
@@ -1834,6 +2342,7 @@
               <a:lnSpc>
                 <a:spcPct val="100000"/>
               </a:lnSpc>
+              <a:defRPr/>
             </a:pPr>
             <a:r>
               <a:rPr lang="de-DE" sz="4400" b="0" strike="noStrike" spc="-1">
@@ -1855,7 +2364,7 @@
       </p:sp>
       <p:sp>
         <p:nvSpPr>
-          <p:cNvPr id="6" name="PlaceHolder 2"/>
+          <p:cNvPr id="1934987476" name="PlaceHolder 2"/>
           <p:cNvSpPr>
             <a:spLocks noGrp="1"/>
           </p:cNvSpPr>
@@ -1863,7 +2372,7 @@
             <p:ph type="body"/>
           </p:nvPr>
         </p:nvSpPr>
-        <p:spPr>
+        <p:spPr bwMode="auto">
           <a:xfrm>
             <a:off x="457200" y="1600200"/>
             <a:ext cx="8229240" cy="4525560"/>
@@ -1894,6 +2403,7 @@
               </a:buClr>
               <a:buFont typeface="Arial"/>
               <a:buChar char="•"/>
+              <a:defRPr/>
             </a:pPr>
             <a:r>
               <a:rPr lang="de-DE" sz="3200" b="0" strike="noStrike" spc="-1">
@@ -1924,6 +2434,7 @@
               </a:buClr>
               <a:buFont typeface="Arial"/>
               <a:buChar char="–"/>
+              <a:defRPr/>
             </a:pPr>
             <a:r>
               <a:rPr lang="de-DE" sz="2800" b="0" strike="noStrike" spc="-1">
@@ -1954,6 +2465,7 @@
               </a:buClr>
               <a:buFont typeface="Arial"/>
               <a:buChar char="•"/>
+              <a:defRPr/>
             </a:pPr>
             <a:r>
               <a:rPr lang="de-DE" sz="2400" b="0" strike="noStrike" spc="-1">
@@ -1984,6 +2496,7 @@
               </a:buClr>
               <a:buFont typeface="Arial"/>
               <a:buChar char="–"/>
+              <a:defRPr/>
             </a:pPr>
             <a:r>
               <a:rPr lang="de-DE" sz="2000" b="0" strike="noStrike" spc="-1">
@@ -2014,6 +2527,7 @@
               </a:buClr>
               <a:buFont typeface="Arial"/>
               <a:buChar char="»"/>
+              <a:defRPr/>
             </a:pPr>
             <a:r>
               <a:rPr lang="de-DE" sz="2000" b="0" strike="noStrike" spc="-1">
@@ -2035,7 +2549,7 @@
       </p:sp>
       <p:sp>
         <p:nvSpPr>
-          <p:cNvPr id="2" name="PlaceHolder 3"/>
+          <p:cNvPr id="1198999392" name="PlaceHolder 3"/>
           <p:cNvSpPr>
             <a:spLocks noGrp="1"/>
           </p:cNvSpPr>
@@ -2043,7 +2557,7 @@
             <p:ph type="dt"/>
           </p:nvPr>
         </p:nvSpPr>
-        <p:spPr>
+        <p:spPr bwMode="auto">
           <a:xfrm>
             <a:off x="457200" y="6356520"/>
             <a:ext cx="2133360" cy="364680"/>
@@ -2066,6 +2580,7 @@
               <a:lnSpc>
                 <a:spcPct val="100000"/>
               </a:lnSpc>
+              <a:defRPr/>
             </a:pPr>
             <a:fld id="{8BFD8582-D51C-4626-941D-72488467BBCA}" type="datetime">
               <a:rPr lang="en-US" sz="1200" b="0" strike="noStrike" spc="-1">
@@ -2084,7 +2599,7 @@
       </p:sp>
       <p:sp>
         <p:nvSpPr>
-          <p:cNvPr id="3" name="PlaceHolder 4"/>
+          <p:cNvPr id="1930802768" name="PlaceHolder 4"/>
           <p:cNvSpPr>
             <a:spLocks noGrp="1"/>
           </p:cNvSpPr>
@@ -2092,7 +2607,7 @@
             <p:ph type="ftr"/>
           </p:nvPr>
         </p:nvSpPr>
-        <p:spPr>
+        <p:spPr bwMode="auto">
           <a:xfrm>
             <a:off x="3124080" y="6356520"/>
             <a:ext cx="2895120" cy="364680"/>
@@ -2111,6 +2626,9 @@
           </a:bodyPr>
           <a:lstStyle/>
           <a:p>
+            <a:pPr>
+              <a:defRPr/>
+            </a:pPr>
             <a:endParaRPr lang="en-US" sz="2400" b="0" strike="noStrike" spc="-1">
               <a:latin typeface="Times New Roman"/>
             </a:endParaRPr>
@@ -2119,7 +2637,7 @@
       </p:sp>
       <p:sp>
         <p:nvSpPr>
-          <p:cNvPr id="4" name="PlaceHolder 5"/>
+          <p:cNvPr id="1784835030" name="PlaceHolder 5"/>
           <p:cNvSpPr>
             <a:spLocks noGrp="1"/>
           </p:cNvSpPr>
@@ -2127,7 +2645,7 @@
             <p:ph type="sldNum"/>
           </p:nvPr>
         </p:nvSpPr>
-        <p:spPr>
+        <p:spPr bwMode="auto">
           <a:xfrm>
             <a:off x="6553080" y="6356520"/>
             <a:ext cx="2133360" cy="364680"/>
@@ -2150,6 +2668,7 @@
               <a:lnSpc>
                 <a:spcPct val="100000"/>
               </a:lnSpc>
+              <a:defRPr/>
             </a:pPr>
             <a:fld id="{461CF666-BD36-486C-9A44-525FF488BFD8}" type="slidenum">
               <a:rPr lang="en-US" sz="1200" b="0" strike="noStrike" spc="-1">
@@ -2185,15 +2704,15 @@
   </p:sldLayoutIdLst>
   <p:txStyles>
     <p:titleStyle>
-      <a:lvl1pPr algn="l" defTabSz="914400" rtl="0" eaLnBrk="1" latinLnBrk="0" hangingPunct="1">
+      <a:lvl1pPr algn="l" defTabSz="914400" rtl="0">
         <a:lnSpc>
           <a:spcPct val="90000"/>
         </a:lnSpc>
         <a:spcBef>
-          <a:spcPct val="0"/>
+          <a:spcPts val="0"/>
         </a:spcBef>
         <a:buNone/>
-        <a:defRPr sz="4400" kern="1200">
+        <a:defRPr sz="4400">
           <a:solidFill>
             <a:schemeClr val="tx1"/>
           </a:solidFill>
@@ -2204,16 +2723,16 @@
       </a:lvl1pPr>
     </p:titleStyle>
     <p:bodyStyle>
-      <a:lvl1pPr marL="228600" indent="-228600" algn="l" defTabSz="914400" rtl="0" eaLnBrk="1" latinLnBrk="0" hangingPunct="1">
+      <a:lvl1pPr marL="228600" indent="-228600" algn="l" defTabSz="914400" rtl="0">
         <a:lnSpc>
           <a:spcPct val="90000"/>
         </a:lnSpc>
         <a:spcBef>
           <a:spcPts val="1000"/>
         </a:spcBef>
-        <a:buFont typeface="Arial" panose="020B0604020202020204" pitchFamily="34" charset="0"/>
+        <a:buFont typeface="Arial"/>
         <a:buChar char="•"/>
-        <a:defRPr sz="2800" kern="1200">
+        <a:defRPr sz="2800">
           <a:solidFill>
             <a:schemeClr val="tx1"/>
           </a:solidFill>
@@ -2222,16 +2741,16 @@
           <a:cs typeface="+mn-cs"/>
         </a:defRPr>
       </a:lvl1pPr>
-      <a:lvl2pPr marL="685800" indent="-228600" algn="l" defTabSz="914400" rtl="0" eaLnBrk="1" latinLnBrk="0" hangingPunct="1">
+      <a:lvl2pPr marL="685800" indent="-228600" algn="l" defTabSz="914400" rtl="0">
         <a:lnSpc>
           <a:spcPct val="90000"/>
         </a:lnSpc>
         <a:spcBef>
           <a:spcPts val="500"/>
         </a:spcBef>
-        <a:buFont typeface="Arial" panose="020B0604020202020204" pitchFamily="34" charset="0"/>
+        <a:buFont typeface="Arial"/>
         <a:buChar char="•"/>
-        <a:defRPr sz="2400" kern="1200">
+        <a:defRPr sz="2400">
           <a:solidFill>
             <a:schemeClr val="tx1"/>
           </a:solidFill>
@@ -2240,16 +2759,16 @@
           <a:cs typeface="+mn-cs"/>
         </a:defRPr>
       </a:lvl2pPr>
-      <a:lvl3pPr marL="1143000" indent="-228600" algn="l" defTabSz="914400" rtl="0" eaLnBrk="1" latinLnBrk="0" hangingPunct="1">
+      <a:lvl3pPr marL="1143000" indent="-228600" algn="l" defTabSz="914400" rtl="0">
         <a:lnSpc>
           <a:spcPct val="90000"/>
         </a:lnSpc>
         <a:spcBef>
           <a:spcPts val="500"/>
         </a:spcBef>
-        <a:buFont typeface="Arial" panose="020B0604020202020204" pitchFamily="34" charset="0"/>
+        <a:buFont typeface="Arial"/>
         <a:buChar char="•"/>
-        <a:defRPr sz="2000" kern="1200">
+        <a:defRPr sz="2000">
           <a:solidFill>
             <a:schemeClr val="tx1"/>
           </a:solidFill>
@@ -2258,16 +2777,16 @@
           <a:cs typeface="+mn-cs"/>
         </a:defRPr>
       </a:lvl3pPr>
-      <a:lvl4pPr marL="1600200" indent="-228600" algn="l" defTabSz="914400" rtl="0" eaLnBrk="1" latinLnBrk="0" hangingPunct="1">
+      <a:lvl4pPr marL="1600200" indent="-228600" algn="l" defTabSz="914400" rtl="0">
         <a:lnSpc>
           <a:spcPct val="90000"/>
         </a:lnSpc>
         <a:spcBef>
           <a:spcPts val="500"/>
         </a:spcBef>
-        <a:buFont typeface="Arial" panose="020B0604020202020204" pitchFamily="34" charset="0"/>
+        <a:buFont typeface="Arial"/>
         <a:buChar char="•"/>
-        <a:defRPr sz="1800" kern="1200">
+        <a:defRPr sz="1800">
           <a:solidFill>
             <a:schemeClr val="tx1"/>
           </a:solidFill>
@@ -2276,16 +2795,16 @@
           <a:cs typeface="+mn-cs"/>
         </a:defRPr>
       </a:lvl4pPr>
-      <a:lvl5pPr marL="2057400" indent="-228600" algn="l" defTabSz="914400" rtl="0" eaLnBrk="1" latinLnBrk="0" hangingPunct="1">
+      <a:lvl5pPr marL="2057400" indent="-228600" algn="l" defTabSz="914400" rtl="0">
         <a:lnSpc>
           <a:spcPct val="90000"/>
         </a:lnSpc>
         <a:spcBef>
           <a:spcPts val="500"/>
         </a:spcBef>
-        <a:buFont typeface="Arial" panose="020B0604020202020204" pitchFamily="34" charset="0"/>
+        <a:buFont typeface="Arial"/>
         <a:buChar char="•"/>
-        <a:defRPr sz="1800" kern="1200">
+        <a:defRPr sz="1800">
           <a:solidFill>
             <a:schemeClr val="tx1"/>
           </a:solidFill>
@@ -2294,16 +2813,16 @@
           <a:cs typeface="+mn-cs"/>
         </a:defRPr>
       </a:lvl5pPr>
-      <a:lvl6pPr marL="2514600" indent="-228600" algn="l" defTabSz="914400" rtl="0" eaLnBrk="1" latinLnBrk="0" hangingPunct="1">
+      <a:lvl6pPr marL="2514600" indent="-228600" algn="l" defTabSz="914400" rtl="0">
         <a:lnSpc>
           <a:spcPct val="90000"/>
         </a:lnSpc>
         <a:spcBef>
           <a:spcPts val="500"/>
         </a:spcBef>
-        <a:buFont typeface="Arial" panose="020B0604020202020204" pitchFamily="34" charset="0"/>
+        <a:buFont typeface="Arial"/>
         <a:buChar char="•"/>
-        <a:defRPr sz="1800" kern="1200">
+        <a:defRPr sz="1800">
           <a:solidFill>
             <a:schemeClr val="tx1"/>
           </a:solidFill>
@@ -2312,16 +2831,16 @@
           <a:cs typeface="+mn-cs"/>
         </a:defRPr>
       </a:lvl6pPr>
-      <a:lvl7pPr marL="2971800" indent="-228600" algn="l" defTabSz="914400" rtl="0" eaLnBrk="1" latinLnBrk="0" hangingPunct="1">
+      <a:lvl7pPr marL="2971800" indent="-228600" algn="l" defTabSz="914400" rtl="0">
         <a:lnSpc>
           <a:spcPct val="90000"/>
         </a:lnSpc>
         <a:spcBef>
           <a:spcPts val="500"/>
         </a:spcBef>
-        <a:buFont typeface="Arial" panose="020B0604020202020204" pitchFamily="34" charset="0"/>
+        <a:buFont typeface="Arial"/>
         <a:buChar char="•"/>
-        <a:defRPr sz="1800" kern="1200">
+        <a:defRPr sz="1800">
           <a:solidFill>
             <a:schemeClr val="tx1"/>
           </a:solidFill>
@@ -2330,16 +2849,16 @@
           <a:cs typeface="+mn-cs"/>
         </a:defRPr>
       </a:lvl7pPr>
-      <a:lvl8pPr marL="3429000" indent="-228600" algn="l" defTabSz="914400" rtl="0" eaLnBrk="1" latinLnBrk="0" hangingPunct="1">
+      <a:lvl8pPr marL="3429000" indent="-228600" algn="l" defTabSz="914400" rtl="0">
         <a:lnSpc>
           <a:spcPct val="90000"/>
         </a:lnSpc>
         <a:spcBef>
           <a:spcPts val="500"/>
         </a:spcBef>
-        <a:buFont typeface="Arial" panose="020B0604020202020204" pitchFamily="34" charset="0"/>
+        <a:buFont typeface="Arial"/>
         <a:buChar char="•"/>
-        <a:defRPr sz="1800" kern="1200">
+        <a:defRPr sz="1800">
           <a:solidFill>
             <a:schemeClr val="tx1"/>
           </a:solidFill>
@@ -2348,16 +2867,16 @@
           <a:cs typeface="+mn-cs"/>
         </a:defRPr>
       </a:lvl8pPr>
-      <a:lvl9pPr marL="3886200" indent="-228600" algn="l" defTabSz="914400" rtl="0" eaLnBrk="1" latinLnBrk="0" hangingPunct="1">
+      <a:lvl9pPr marL="3886200" indent="-228600" algn="l" defTabSz="914400" rtl="0">
         <a:lnSpc>
           <a:spcPct val="90000"/>
         </a:lnSpc>
         <a:spcBef>
           <a:spcPts val="500"/>
         </a:spcBef>
-        <a:buFont typeface="Arial" panose="020B0604020202020204" pitchFamily="34" charset="0"/>
+        <a:buFont typeface="Arial"/>
         <a:buChar char="•"/>
-        <a:defRPr sz="1800" kern="1200">
+        <a:defRPr sz="1800">
           <a:solidFill>
             <a:schemeClr val="tx1"/>
           </a:solidFill>
@@ -2369,10 +2888,10 @@
     </p:bodyStyle>
     <p:otherStyle>
       <a:defPPr>
-        <a:defRPr lang="en-DE"/>
+        <a:defRPr/>
       </a:defPPr>
-      <a:lvl1pPr marL="0" algn="l" defTabSz="914400" rtl="0" eaLnBrk="1" latinLnBrk="0" hangingPunct="1">
-        <a:defRPr sz="1800" kern="1200">
+      <a:lvl1pPr marL="0" algn="l" defTabSz="914400" rtl="0">
+        <a:defRPr sz="1800">
           <a:solidFill>
             <a:schemeClr val="tx1"/>
           </a:solidFill>
@@ -2381,8 +2900,8 @@
           <a:cs typeface="+mn-cs"/>
         </a:defRPr>
       </a:lvl1pPr>
-      <a:lvl2pPr marL="457200" algn="l" defTabSz="914400" rtl="0" eaLnBrk="1" latinLnBrk="0" hangingPunct="1">
-        <a:defRPr sz="1800" kern="1200">
+      <a:lvl2pPr marL="457200" algn="l" defTabSz="914400" rtl="0">
+        <a:defRPr sz="1800">
           <a:solidFill>
             <a:schemeClr val="tx1"/>
           </a:solidFill>
@@ -2391,8 +2910,8 @@
           <a:cs typeface="+mn-cs"/>
         </a:defRPr>
       </a:lvl2pPr>
-      <a:lvl3pPr marL="914400" algn="l" defTabSz="914400" rtl="0" eaLnBrk="1" latinLnBrk="0" hangingPunct="1">
-        <a:defRPr sz="1800" kern="1200">
+      <a:lvl3pPr marL="914400" algn="l" defTabSz="914400" rtl="0">
+        <a:defRPr sz="1800">
           <a:solidFill>
             <a:schemeClr val="tx1"/>
           </a:solidFill>
@@ -2401,8 +2920,8 @@
           <a:cs typeface="+mn-cs"/>
         </a:defRPr>
       </a:lvl3pPr>
-      <a:lvl4pPr marL="1371600" algn="l" defTabSz="914400" rtl="0" eaLnBrk="1" latinLnBrk="0" hangingPunct="1">
-        <a:defRPr sz="1800" kern="1200">
+      <a:lvl4pPr marL="1371600" algn="l" defTabSz="914400" rtl="0">
+        <a:defRPr sz="1800">
           <a:solidFill>
             <a:schemeClr val="tx1"/>
           </a:solidFill>
@@ -2411,8 +2930,8 @@
           <a:cs typeface="+mn-cs"/>
         </a:defRPr>
       </a:lvl4pPr>
-      <a:lvl5pPr marL="1828800" algn="l" defTabSz="914400" rtl="0" eaLnBrk="1" latinLnBrk="0" hangingPunct="1">
-        <a:defRPr sz="1800" kern="1200">
+      <a:lvl5pPr marL="1828800" algn="l" defTabSz="914400" rtl="0">
+        <a:defRPr sz="1800">
           <a:solidFill>
             <a:schemeClr val="tx1"/>
           </a:solidFill>
@@ -2421,8 +2940,8 @@
           <a:cs typeface="+mn-cs"/>
         </a:defRPr>
       </a:lvl5pPr>
-      <a:lvl6pPr marL="2286000" algn="l" defTabSz="914400" rtl="0" eaLnBrk="1" latinLnBrk="0" hangingPunct="1">
-        <a:defRPr sz="1800" kern="1200">
+      <a:lvl6pPr marL="2286000" algn="l" defTabSz="914400" rtl="0">
+        <a:defRPr sz="1800">
           <a:solidFill>
             <a:schemeClr val="tx1"/>
           </a:solidFill>
@@ -2431,8 +2950,8 @@
           <a:cs typeface="+mn-cs"/>
         </a:defRPr>
       </a:lvl6pPr>
-      <a:lvl7pPr marL="2743200" algn="l" defTabSz="914400" rtl="0" eaLnBrk="1" latinLnBrk="0" hangingPunct="1">
-        <a:defRPr sz="1800" kern="1200">
+      <a:lvl7pPr marL="2743200" algn="l" defTabSz="914400" rtl="0">
+        <a:defRPr sz="1800">
           <a:solidFill>
             <a:schemeClr val="tx1"/>
           </a:solidFill>
@@ -2441,8 +2960,8 @@
           <a:cs typeface="+mn-cs"/>
         </a:defRPr>
       </a:lvl7pPr>
-      <a:lvl8pPr marL="3200400" algn="l" defTabSz="914400" rtl="0" eaLnBrk="1" latinLnBrk="0" hangingPunct="1">
-        <a:defRPr sz="1800" kern="1200">
+      <a:lvl8pPr marL="3200400" algn="l" defTabSz="914400" rtl="0">
+        <a:defRPr sz="1800">
           <a:solidFill>
             <a:schemeClr val="tx1"/>
           </a:solidFill>
@@ -2451,8 +2970,8 @@
           <a:cs typeface="+mn-cs"/>
         </a:defRPr>
       </a:lvl8pPr>
-      <a:lvl9pPr marL="3657600" algn="l" defTabSz="914400" rtl="0" eaLnBrk="1" latinLnBrk="0" hangingPunct="1">
-        <a:defRPr sz="1800" kern="1200">
+      <a:lvl9pPr marL="3657600" algn="l" defTabSz="914400" rtl="0">
+        <a:defRPr sz="1800">
           <a:solidFill>
             <a:schemeClr val="tx1"/>
           </a:solidFill>
@@ -2467,15 +2986,15 @@
 </file>
 
 <file path=ppt/slides/slide1.xml><?xml version="1.0" encoding="utf-8"?>
-<p:sld xmlns:a="http://schemas.openxmlformats.org/drawingml/2006/main" xmlns:r="http://schemas.openxmlformats.org/officeDocument/2006/relationships" xmlns:p="http://schemas.openxmlformats.org/presentationml/2006/main">
-  <p:cSld>
+<p:sld xmlns:a="http://schemas.openxmlformats.org/drawingml/2006/main" xmlns:r="http://schemas.openxmlformats.org/officeDocument/2006/relationships" xmlns:p="http://schemas.openxmlformats.org/presentationml/2006/main" xmlns:m="http://schemas.openxmlformats.org/officeDocument/2006/math" xmlns:w="http://schemas.openxmlformats.org/wordprocessingml/2006/main" xmlns:mc="http://schemas.openxmlformats.org/markup-compatibility/2006" showMasterPhAnim="0" showMasterSp="1" show="1">
+  <p:cSld name="">
     <p:spTree>
       <p:nvGrpSpPr>
         <p:cNvPr id="1" name=""/>
         <p:cNvGrpSpPr/>
         <p:nvPr/>
       </p:nvGrpSpPr>
-      <p:grpSpPr>
+      <p:grpSpPr bwMode="auto">
         <a:xfrm>
           <a:off x="0" y="0"/>
           <a:ext cx="0" cy="0"/>
@@ -2485,17 +3004,11 @@
       </p:grpSpPr>
       <p:sp>
         <p:nvSpPr>
-          <p:cNvPr id="3" name="Rectangle 2">
-            <a:extLst>
-              <a:ext uri="{FF2B5EF4-FFF2-40B4-BE49-F238E27FC236}">
-                <a16:creationId xmlns:a16="http://schemas.microsoft.com/office/drawing/2014/main" id="{A116E462-E4E1-42FA-A1FA-5037E25E2199}"/>
-              </a:ext>
-            </a:extLst>
-          </p:cNvPr>
+          <p:cNvPr id="327869584" name="Rectangle 2"/>
           <p:cNvSpPr/>
           <p:nvPr/>
         </p:nvSpPr>
-        <p:spPr>
+        <p:spPr bwMode="auto">
           <a:xfrm>
             <a:off x="89012" y="121320"/>
             <a:ext cx="8941700" cy="6615360"/>
@@ -2530,18 +3043,20 @@
           <a:bodyPr rtlCol="0" anchor="ctr"/>
           <a:lstStyle/>
           <a:p>
-            <a:pPr algn="ctr"/>
+            <a:pPr algn="ctr">
+              <a:defRPr/>
+            </a:pPr>
             <a:endParaRPr lang="en-US"/>
           </a:p>
         </p:txBody>
       </p:sp>
       <p:sp>
         <p:nvSpPr>
-          <p:cNvPr id="228" name="Ellipse 8"/>
+          <p:cNvPr id="1343934614" name="Ellipse 8"/>
           <p:cNvSpPr/>
           <p:nvPr/>
         </p:nvSpPr>
-        <p:spPr>
+        <p:spPr bwMode="auto">
           <a:xfrm>
             <a:off x="3367440" y="152280"/>
             <a:ext cx="1509120" cy="542520"/>
@@ -2581,6 +3096,7 @@
               <a:lnSpc>
                 <a:spcPct val="100000"/>
               </a:lnSpc>
+              <a:defRPr/>
             </a:pPr>
             <a:r>
               <a:rPr lang="de-DE" sz="1100" b="1" strike="noStrike" spc="-1">
@@ -2599,13 +3115,13 @@
       </p:sp>
       <p:sp>
         <p:nvSpPr>
-          <p:cNvPr id="229" name="Ellipse 9"/>
+          <p:cNvPr id="1547405041" name="Ellipse 9"/>
           <p:cNvSpPr/>
           <p:nvPr/>
         </p:nvSpPr>
-        <p:spPr>
-          <a:xfrm>
-            <a:off x="3367440" y="1436760"/>
+        <p:spPr bwMode="auto">
+          <a:xfrm>
+            <a:off x="3367440" y="1436759"/>
             <a:ext cx="1509120" cy="620280"/>
           </a:xfrm>
           <a:prstGeom prst="ellipse">
@@ -2643,6 +3159,7 @@
               <a:lnSpc>
                 <a:spcPct val="100000"/>
               </a:lnSpc>
+              <a:defRPr/>
             </a:pPr>
             <a:r>
               <a:rPr lang="de-DE" sz="1100" b="1" strike="noStrike" spc="-1">
@@ -2661,11 +3178,11 @@
       </p:sp>
       <p:sp>
         <p:nvSpPr>
-          <p:cNvPr id="230" name="Ellipse 10"/>
+          <p:cNvPr id="1674630231" name="Ellipse 10"/>
           <p:cNvSpPr/>
           <p:nvPr/>
         </p:nvSpPr>
-        <p:spPr>
+        <p:spPr bwMode="auto">
           <a:xfrm>
             <a:off x="3367440" y="817200"/>
             <a:ext cx="1509120" cy="554040"/>
@@ -2705,6 +3222,7 @@
               <a:lnSpc>
                 <a:spcPct val="100000"/>
               </a:lnSpc>
+              <a:defRPr/>
             </a:pPr>
             <a:r>
               <a:rPr lang="de-DE" sz="1100" b="1" strike="noStrike" spc="-1">
@@ -2723,11 +3241,11 @@
       </p:sp>
       <p:sp>
         <p:nvSpPr>
-          <p:cNvPr id="232" name="Gerade Verbindung mit Pfeil 12"/>
+          <p:cNvPr id="602227173" name="Gerade Verbindung mit Pfeil 12"/>
           <p:cNvSpPr/>
           <p:nvPr/>
         </p:nvSpPr>
-        <p:spPr>
+        <p:spPr bwMode="auto">
           <a:xfrm flipV="1">
             <a:off x="4876920" y="422640"/>
             <a:ext cx="3404880" cy="360"/>
@@ -2739,7 +3257,7 @@
             <a:cxnLst/>
             <a:rect l="l" t="t" r="r" b="b"/>
             <a:pathLst>
-              <a:path w="21600" h="21600">
+              <a:path w="21600" h="21600" fill="norm" stroke="1" extrusionOk="0">
                 <a:moveTo>
                   <a:pt x="0" y="0"/>
                 </a:moveTo>
@@ -2773,11 +3291,11 @@
       </p:sp>
       <p:sp>
         <p:nvSpPr>
-          <p:cNvPr id="233" name="Textfeld 23"/>
+          <p:cNvPr id="604131056" name="Textfeld 23"/>
           <p:cNvSpPr/>
           <p:nvPr/>
         </p:nvSpPr>
-        <p:spPr>
+        <p:spPr bwMode="auto">
           <a:xfrm>
             <a:off x="6172200" y="180360"/>
             <a:ext cx="2033280" cy="272880"/>
@@ -2792,13 +3310,13 @@
         </p:spPr>
         <p:style>
           <a:lnRef idx="0">
-            <a:scrgbClr r="0" g="0" b="0"/>
+            <a:srgbClr val="000000"/>
           </a:lnRef>
           <a:fillRef idx="0">
-            <a:scrgbClr r="0" g="0" b="0"/>
+            <a:srgbClr val="000000"/>
           </a:fillRef>
           <a:effectRef idx="0">
-            <a:scrgbClr r="0" g="0" b="0"/>
+            <a:srgbClr val="000000"/>
           </a:effectRef>
           <a:fontRef idx="minor"/>
         </p:style>
@@ -2812,6 +3330,7 @@
               <a:lnSpc>
                 <a:spcPct val="100000"/>
               </a:lnSpc>
+              <a:defRPr/>
             </a:pPr>
             <a:r>
               <a:rPr lang="de-DE" sz="1200" b="1" i="1" strike="noStrike" spc="-1">
@@ -2830,11 +3349,11 @@
       </p:sp>
       <p:sp>
         <p:nvSpPr>
-          <p:cNvPr id="234" name="Gerade Verbindung mit Pfeil 13"/>
+          <p:cNvPr id="229550381" name="Gerade Verbindung mit Pfeil 13"/>
           <p:cNvSpPr/>
           <p:nvPr/>
         </p:nvSpPr>
-        <p:spPr>
+        <p:spPr bwMode="auto">
           <a:xfrm flipV="1">
             <a:off x="4876920" y="1093320"/>
             <a:ext cx="3428640" cy="360"/>
@@ -2846,7 +3365,7 @@
             <a:cxnLst/>
             <a:rect l="l" t="t" r="r" b="b"/>
             <a:pathLst>
-              <a:path w="21600" h="21600">
+              <a:path w="21600" h="21600" fill="norm" stroke="1" extrusionOk="0">
                 <a:moveTo>
                   <a:pt x="0" y="0"/>
                 </a:moveTo>
@@ -2880,11 +3399,11 @@
       </p:sp>
       <p:sp>
         <p:nvSpPr>
-          <p:cNvPr id="235" name="Textfeld 24"/>
+          <p:cNvPr id="1995260295" name="Textfeld 24"/>
           <p:cNvSpPr/>
           <p:nvPr/>
         </p:nvSpPr>
-        <p:spPr>
+        <p:spPr bwMode="auto">
           <a:xfrm>
             <a:off x="6172200" y="826920"/>
             <a:ext cx="2033280" cy="272880"/>
@@ -2899,13 +3418,13 @@
         </p:spPr>
         <p:style>
           <a:lnRef idx="0">
-            <a:scrgbClr r="0" g="0" b="0"/>
+            <a:srgbClr val="000000"/>
           </a:lnRef>
           <a:fillRef idx="0">
-            <a:scrgbClr r="0" g="0" b="0"/>
+            <a:srgbClr val="000000"/>
           </a:fillRef>
           <a:effectRef idx="0">
-            <a:scrgbClr r="0" g="0" b="0"/>
+            <a:srgbClr val="000000"/>
           </a:effectRef>
           <a:fontRef idx="minor"/>
         </p:style>
@@ -2919,6 +3438,7 @@
               <a:lnSpc>
                 <a:spcPct val="100000"/>
               </a:lnSpc>
+              <a:defRPr/>
             </a:pPr>
             <a:r>
               <a:rPr lang="de-DE" sz="1200" b="1" i="1" strike="noStrike" spc="-1">
@@ -2937,11 +3457,11 @@
       </p:sp>
       <p:sp>
         <p:nvSpPr>
-          <p:cNvPr id="236" name="Gerade Verbindung mit Pfeil 14"/>
+          <p:cNvPr id="185739199" name="Gerade Verbindung mit Pfeil 14"/>
           <p:cNvSpPr/>
           <p:nvPr/>
         </p:nvSpPr>
-        <p:spPr>
+        <p:spPr bwMode="auto">
           <a:xfrm>
             <a:off x="4876920" y="1747080"/>
             <a:ext cx="3413880" cy="360"/>
@@ -2953,7 +3473,7 @@
             <a:cxnLst/>
             <a:rect l="l" t="t" r="r" b="b"/>
             <a:pathLst>
-              <a:path w="21600" h="21600">
+              <a:path w="21600" h="21600" fill="norm" stroke="1" extrusionOk="0">
                 <a:moveTo>
                   <a:pt x="0" y="0"/>
                 </a:moveTo>
@@ -2987,11 +3507,11 @@
       </p:sp>
       <p:sp>
         <p:nvSpPr>
-          <p:cNvPr id="237" name="Textfeld 26"/>
+          <p:cNvPr id="494009810" name="Textfeld 26"/>
           <p:cNvSpPr/>
           <p:nvPr/>
         </p:nvSpPr>
-        <p:spPr>
+        <p:spPr bwMode="auto">
           <a:xfrm>
             <a:off x="6120000" y="1475640"/>
             <a:ext cx="2033280" cy="272880"/>
@@ -3006,13 +3526,13 @@
         </p:spPr>
         <p:style>
           <a:lnRef idx="0">
-            <a:scrgbClr r="0" g="0" b="0"/>
+            <a:srgbClr val="000000"/>
           </a:lnRef>
           <a:fillRef idx="0">
-            <a:scrgbClr r="0" g="0" b="0"/>
+            <a:srgbClr val="000000"/>
           </a:fillRef>
           <a:effectRef idx="0">
-            <a:scrgbClr r="0" g="0" b="0"/>
+            <a:srgbClr val="000000"/>
           </a:effectRef>
           <a:fontRef idx="minor"/>
         </p:style>
@@ -3026,6 +3546,7 @@
               <a:lnSpc>
                 <a:spcPct val="100000"/>
               </a:lnSpc>
+              <a:defRPr/>
             </a:pPr>
             <a:r>
               <a:rPr lang="de-DE" sz="1200" b="1" i="1" strike="noStrike" spc="-1">
@@ -3044,11 +3565,11 @@
       </p:sp>
       <p:sp>
         <p:nvSpPr>
-          <p:cNvPr id="238" name="Gerade Verbindung mit Pfeil 15"/>
+          <p:cNvPr id="1188880445" name="Gerade Verbindung mit Pfeil 15"/>
           <p:cNvSpPr/>
           <p:nvPr/>
         </p:nvSpPr>
-        <p:spPr>
+        <p:spPr bwMode="auto">
           <a:xfrm flipH="1">
             <a:off x="4862160" y="2511000"/>
             <a:ext cx="3428640" cy="360"/>
@@ -3060,7 +3581,7 @@
             <a:cxnLst/>
             <a:rect l="l" t="t" r="r" b="b"/>
             <a:pathLst>
-              <a:path w="21600" h="21600">
+              <a:path w="21600" h="21600" fill="norm" stroke="1" extrusionOk="0">
                 <a:moveTo>
                   <a:pt x="0" y="0"/>
                 </a:moveTo>
@@ -3094,11 +3615,11 @@
       </p:sp>
       <p:sp>
         <p:nvSpPr>
-          <p:cNvPr id="239" name="Textfeld 27"/>
+          <p:cNvPr id="984246608" name="Textfeld 27"/>
           <p:cNvSpPr/>
           <p:nvPr/>
         </p:nvSpPr>
-        <p:spPr>
+        <p:spPr bwMode="auto">
           <a:xfrm>
             <a:off x="6095880" y="2268360"/>
             <a:ext cx="2101320" cy="272880"/>
@@ -3113,13 +3634,13 @@
         </p:spPr>
         <p:style>
           <a:lnRef idx="0">
-            <a:scrgbClr r="0" g="0" b="0"/>
+            <a:srgbClr val="000000"/>
           </a:lnRef>
           <a:fillRef idx="0">
-            <a:scrgbClr r="0" g="0" b="0"/>
+            <a:srgbClr val="000000"/>
           </a:fillRef>
           <a:effectRef idx="0">
-            <a:scrgbClr r="0" g="0" b="0"/>
+            <a:srgbClr val="000000"/>
           </a:effectRef>
           <a:fontRef idx="minor"/>
         </p:style>
@@ -3133,6 +3654,7 @@
               <a:lnSpc>
                 <a:spcPct val="100000"/>
               </a:lnSpc>
+              <a:defRPr/>
             </a:pPr>
             <a:r>
               <a:rPr lang="de-DE" sz="1200" b="1" i="1" strike="noStrike" spc="-1">
@@ -3151,13 +3673,13 @@
       </p:sp>
       <p:sp>
         <p:nvSpPr>
-          <p:cNvPr id="240" name="Gerade Verbindung mit Pfeil 16"/>
+          <p:cNvPr id="991071219" name="Gerade Verbindung mit Pfeil 16"/>
           <p:cNvSpPr/>
           <p:nvPr/>
         </p:nvSpPr>
-        <p:spPr>
-          <a:xfrm>
-            <a:off x="4915080" y="3008520"/>
+        <p:spPr bwMode="auto">
+          <a:xfrm>
+            <a:off x="4915080" y="3008519"/>
             <a:ext cx="3376080" cy="360"/>
           </a:xfrm>
           <a:custGeom>
@@ -3167,7 +3689,7 @@
             <a:cxnLst/>
             <a:rect l="l" t="t" r="r" b="b"/>
             <a:pathLst>
-              <a:path w="21600" h="21600">
+              <a:path w="21600" h="21600" fill="norm" stroke="1" extrusionOk="0">
                 <a:moveTo>
                   <a:pt x="0" y="0"/>
                 </a:moveTo>
@@ -3201,11 +3723,11 @@
       </p:sp>
       <p:sp>
         <p:nvSpPr>
-          <p:cNvPr id="241" name="Textfeld 29"/>
+          <p:cNvPr id="2084108092" name="Textfeld 29"/>
           <p:cNvSpPr/>
           <p:nvPr/>
         </p:nvSpPr>
-        <p:spPr>
+        <p:spPr bwMode="auto">
           <a:xfrm>
             <a:off x="6095880" y="2743200"/>
             <a:ext cx="2101320" cy="272880"/>
@@ -3220,13 +3742,13 @@
         </p:spPr>
         <p:style>
           <a:lnRef idx="0">
-            <a:scrgbClr r="0" g="0" b="0"/>
+            <a:srgbClr val="000000"/>
           </a:lnRef>
           <a:fillRef idx="0">
-            <a:scrgbClr r="0" g="0" b="0"/>
+            <a:srgbClr val="000000"/>
           </a:fillRef>
           <a:effectRef idx="0">
-            <a:scrgbClr r="0" g="0" b="0"/>
+            <a:srgbClr val="000000"/>
           </a:effectRef>
           <a:fontRef idx="minor"/>
         </p:style>
@@ -3240,6 +3762,7 @@
               <a:lnSpc>
                 <a:spcPct val="100000"/>
               </a:lnSpc>
+              <a:defRPr/>
             </a:pPr>
             <a:r>
               <a:rPr lang="de-DE" sz="1200" b="1" i="1" strike="noStrike" spc="-1">
@@ -3258,11 +3781,11 @@
       </p:sp>
       <p:sp>
         <p:nvSpPr>
-          <p:cNvPr id="242" name="Gerade Verbindung mit Pfeil 17"/>
+          <p:cNvPr id="681373172" name="Gerade Verbindung mit Pfeil 17"/>
           <p:cNvSpPr/>
           <p:nvPr/>
         </p:nvSpPr>
-        <p:spPr>
+        <p:spPr bwMode="auto">
           <a:xfrm flipH="1" flipV="1">
             <a:off x="4862160" y="3602880"/>
             <a:ext cx="3428640" cy="1800"/>
@@ -3274,7 +3797,7 @@
             <a:cxnLst/>
             <a:rect l="l" t="t" r="r" b="b"/>
             <a:pathLst>
-              <a:path w="21600" h="21600">
+              <a:path w="21600" h="21600" fill="norm" stroke="1" extrusionOk="0">
                 <a:moveTo>
                   <a:pt x="0" y="0"/>
                 </a:moveTo>
@@ -3308,11 +3831,11 @@
       </p:sp>
       <p:sp>
         <p:nvSpPr>
-          <p:cNvPr id="243" name="Gerade Verbindung mit Pfeil 18"/>
+          <p:cNvPr id="1576700957" name="Gerade Verbindung mit Pfeil 18"/>
           <p:cNvSpPr/>
           <p:nvPr/>
         </p:nvSpPr>
-        <p:spPr>
+        <p:spPr bwMode="auto">
           <a:xfrm flipV="1">
             <a:off x="4876920" y="4196880"/>
             <a:ext cx="3428640" cy="23400"/>
@@ -3324,7 +3847,7 @@
             <a:cxnLst/>
             <a:rect l="l" t="t" r="r" b="b"/>
             <a:pathLst>
-              <a:path w="21600" h="21600">
+              <a:path w="21600" h="21600" fill="norm" stroke="1" extrusionOk="0">
                 <a:moveTo>
                   <a:pt x="0" y="0"/>
                 </a:moveTo>
@@ -3358,11 +3881,11 @@
       </p:sp>
       <p:sp>
         <p:nvSpPr>
-          <p:cNvPr id="244" name="Textfeld 30"/>
+          <p:cNvPr id="1410977032" name="Textfeld 30"/>
           <p:cNvSpPr/>
           <p:nvPr/>
         </p:nvSpPr>
-        <p:spPr>
+        <p:spPr bwMode="auto">
           <a:xfrm>
             <a:off x="6095880" y="3982320"/>
             <a:ext cx="2114640" cy="455400"/>
@@ -3377,13 +3900,13 @@
         </p:spPr>
         <p:style>
           <a:lnRef idx="0">
-            <a:scrgbClr r="0" g="0" b="0"/>
+            <a:srgbClr val="000000"/>
           </a:lnRef>
           <a:fillRef idx="0">
-            <a:scrgbClr r="0" g="0" b="0"/>
+            <a:srgbClr val="000000"/>
           </a:fillRef>
           <a:effectRef idx="0">
-            <a:scrgbClr r="0" g="0" b="0"/>
+            <a:srgbClr val="000000"/>
           </a:effectRef>
           <a:fontRef idx="minor"/>
         </p:style>
@@ -3397,6 +3920,7 @@
               <a:lnSpc>
                 <a:spcPct val="100000"/>
               </a:lnSpc>
+              <a:defRPr/>
             </a:pPr>
             <a:r>
               <a:rPr lang="de-DE" sz="1200" b="1" strike="noStrike" spc="-1">
@@ -3416,6 +3940,7 @@
               <a:lnSpc>
                 <a:spcPct val="100000"/>
               </a:lnSpc>
+              <a:defRPr/>
             </a:pPr>
             <a:r>
               <a:rPr lang="de-DE" sz="1200" b="1" strike="noStrike" spc="-1">
@@ -3434,11 +3959,11 @@
       </p:sp>
       <p:sp>
         <p:nvSpPr>
-          <p:cNvPr id="245" name="Gerade Verbindung mit Pfeil 19"/>
+          <p:cNvPr id="1795352316" name="Gerade Verbindung mit Pfeil 19"/>
           <p:cNvSpPr/>
           <p:nvPr/>
         </p:nvSpPr>
-        <p:spPr>
+        <p:spPr bwMode="auto">
           <a:xfrm flipH="1" flipV="1">
             <a:off x="4876200" y="5973480"/>
             <a:ext cx="3413880" cy="15120"/>
@@ -3450,7 +3975,7 @@
             <a:cxnLst/>
             <a:rect l="l" t="t" r="r" b="b"/>
             <a:pathLst>
-              <a:path w="21600" h="21600">
+              <a:path w="21600" h="21600" fill="norm" stroke="1" extrusionOk="0">
                 <a:moveTo>
                   <a:pt x="0" y="0"/>
                 </a:moveTo>
@@ -3484,11 +4009,11 @@
       </p:sp>
       <p:sp>
         <p:nvSpPr>
-          <p:cNvPr id="246" name="Textfeld 31"/>
+          <p:cNvPr id="1471266403" name="Textfeld 31"/>
           <p:cNvSpPr/>
           <p:nvPr/>
         </p:nvSpPr>
-        <p:spPr>
+        <p:spPr bwMode="auto">
           <a:xfrm>
             <a:off x="6095880" y="5743800"/>
             <a:ext cx="2176200" cy="272880"/>
@@ -3503,13 +4028,13 @@
         </p:spPr>
         <p:style>
           <a:lnRef idx="0">
-            <a:scrgbClr r="0" g="0" b="0"/>
+            <a:srgbClr val="000000"/>
           </a:lnRef>
           <a:fillRef idx="0">
-            <a:scrgbClr r="0" g="0" b="0"/>
+            <a:srgbClr val="000000"/>
           </a:fillRef>
           <a:effectRef idx="0">
-            <a:scrgbClr r="0" g="0" b="0"/>
+            <a:srgbClr val="000000"/>
           </a:effectRef>
           <a:fontRef idx="minor"/>
         </p:style>
@@ -3523,6 +4048,7 @@
               <a:lnSpc>
                 <a:spcPct val="100000"/>
               </a:lnSpc>
+              <a:defRPr/>
             </a:pPr>
             <a:r>
               <a:rPr lang="de-DE" sz="1200" b="1" strike="noStrike" spc="-1">
@@ -3541,11 +4067,11 @@
       </p:sp>
       <p:sp>
         <p:nvSpPr>
-          <p:cNvPr id="247" name="Gerade Verbindung mit Pfeil 20"/>
+          <p:cNvPr id="1177726013" name="Gerade Verbindung mit Pfeil 20"/>
           <p:cNvSpPr/>
           <p:nvPr/>
         </p:nvSpPr>
-        <p:spPr>
+        <p:spPr bwMode="auto">
           <a:xfrm flipV="1">
             <a:off x="4862160" y="6212160"/>
             <a:ext cx="3428640" cy="6840"/>
@@ -3557,7 +4083,7 @@
             <a:cxnLst/>
             <a:rect l="l" t="t" r="r" b="b"/>
             <a:pathLst>
-              <a:path w="21600" h="21600">
+              <a:path w="21600" h="21600" fill="norm" stroke="1" extrusionOk="0">
                 <a:moveTo>
                   <a:pt x="0" y="0"/>
                 </a:moveTo>
@@ -3591,11 +4117,11 @@
       </p:sp>
       <p:sp>
         <p:nvSpPr>
-          <p:cNvPr id="248" name="Textfeld 32"/>
+          <p:cNvPr id="1260915377" name="Textfeld 32"/>
           <p:cNvSpPr/>
           <p:nvPr/>
         </p:nvSpPr>
-        <p:spPr>
+        <p:spPr bwMode="auto">
           <a:xfrm>
             <a:off x="6120000" y="6192000"/>
             <a:ext cx="2085480" cy="272880"/>
@@ -3610,13 +4136,13 @@
         </p:spPr>
         <p:style>
           <a:lnRef idx="0">
-            <a:scrgbClr r="0" g="0" b="0"/>
+            <a:srgbClr val="000000"/>
           </a:lnRef>
           <a:fillRef idx="0">
-            <a:scrgbClr r="0" g="0" b="0"/>
+            <a:srgbClr val="000000"/>
           </a:fillRef>
           <a:effectRef idx="0">
-            <a:scrgbClr r="0" g="0" b="0"/>
+            <a:srgbClr val="000000"/>
           </a:effectRef>
           <a:fontRef idx="minor"/>
         </p:style>
@@ -3630,6 +4156,7 @@
               <a:lnSpc>
                 <a:spcPct val="100000"/>
               </a:lnSpc>
+              <a:defRPr/>
             </a:pPr>
             <a:r>
               <a:rPr lang="de-DE" sz="1200" b="1" strike="noStrike" spc="-1">
@@ -3648,11 +4175,11 @@
       </p:sp>
       <p:sp>
         <p:nvSpPr>
-          <p:cNvPr id="249" name="Textfeld 33"/>
+          <p:cNvPr id="7125031" name="Textfeld 33"/>
           <p:cNvSpPr/>
           <p:nvPr/>
         </p:nvSpPr>
-        <p:spPr>
+        <p:spPr bwMode="auto">
           <a:xfrm>
             <a:off x="609480" y="309960"/>
             <a:ext cx="1294920" cy="272880"/>
@@ -3667,13 +4194,13 @@
         </p:spPr>
         <p:style>
           <a:lnRef idx="0">
-            <a:scrgbClr r="0" g="0" b="0"/>
+            <a:srgbClr val="000000"/>
           </a:lnRef>
           <a:fillRef idx="0">
-            <a:scrgbClr r="0" g="0" b="0"/>
+            <a:srgbClr val="000000"/>
           </a:fillRef>
           <a:effectRef idx="0">
-            <a:scrgbClr r="0" g="0" b="0"/>
+            <a:srgbClr val="000000"/>
           </a:effectRef>
           <a:fontRef idx="minor"/>
         </p:style>
@@ -3687,6 +4214,7 @@
               <a:lnSpc>
                 <a:spcPct val="100000"/>
               </a:lnSpc>
+              <a:defRPr/>
             </a:pPr>
             <a:r>
               <a:rPr lang="de-DE" sz="1200" b="0" strike="noStrike" spc="-1">
@@ -3705,11 +4233,11 @@
       </p:sp>
       <p:sp>
         <p:nvSpPr>
-          <p:cNvPr id="250" name="Textfeld 34"/>
+          <p:cNvPr id="88605554" name="Textfeld 34"/>
           <p:cNvSpPr/>
           <p:nvPr/>
         </p:nvSpPr>
-        <p:spPr>
+        <p:spPr bwMode="auto">
           <a:xfrm>
             <a:off x="609480" y="942120"/>
             <a:ext cx="1523520" cy="272880"/>
@@ -3724,13 +4252,13 @@
         </p:spPr>
         <p:style>
           <a:lnRef idx="0">
-            <a:scrgbClr r="0" g="0" b="0"/>
+            <a:srgbClr val="000000"/>
           </a:lnRef>
           <a:fillRef idx="0">
-            <a:scrgbClr r="0" g="0" b="0"/>
+            <a:srgbClr val="000000"/>
           </a:fillRef>
           <a:effectRef idx="0">
-            <a:scrgbClr r="0" g="0" b="0"/>
+            <a:srgbClr val="000000"/>
           </a:effectRef>
           <a:fontRef idx="minor"/>
         </p:style>
@@ -3744,6 +4272,7 @@
               <a:lnSpc>
                 <a:spcPct val="100000"/>
               </a:lnSpc>
+              <a:defRPr/>
             </a:pPr>
             <a:r>
               <a:rPr lang="de-DE" sz="1200" b="0" strike="noStrike" spc="-1">
@@ -3762,13 +4291,13 @@
       </p:sp>
       <p:sp>
         <p:nvSpPr>
-          <p:cNvPr id="251" name="Gerade Verbindung 10"/>
+          <p:cNvPr id="1859504755" name="Gerade Verbindung 10"/>
           <p:cNvSpPr/>
           <p:nvPr/>
         </p:nvSpPr>
-        <p:spPr>
-          <a:xfrm>
-            <a:off x="1904760" y="448200"/>
+        <p:spPr bwMode="auto">
+          <a:xfrm>
+            <a:off x="1904759" y="448200"/>
             <a:ext cx="1316880" cy="2520"/>
           </a:xfrm>
           <a:prstGeom prst="line">
@@ -3799,11 +4328,11 @@
       </p:sp>
       <p:sp>
         <p:nvSpPr>
-          <p:cNvPr id="252" name="Gerade Verbindung 11"/>
+          <p:cNvPr id="643782371" name="Gerade Verbindung 11"/>
           <p:cNvSpPr/>
           <p:nvPr/>
         </p:nvSpPr>
-        <p:spPr>
+        <p:spPr bwMode="auto">
           <a:xfrm>
             <a:off x="2133360" y="1080360"/>
             <a:ext cx="1088280" cy="17280"/>
@@ -3836,11 +4365,11 @@
       </p:sp>
       <p:sp>
         <p:nvSpPr>
-          <p:cNvPr id="253" name="Textfeld 35"/>
+          <p:cNvPr id="1819459369" name="Textfeld 35"/>
           <p:cNvSpPr/>
           <p:nvPr/>
         </p:nvSpPr>
-        <p:spPr>
+        <p:spPr bwMode="auto">
           <a:xfrm>
             <a:off x="609480" y="1600200"/>
             <a:ext cx="1371240" cy="272880"/>
@@ -3855,13 +4384,13 @@
         </p:spPr>
         <p:style>
           <a:lnRef idx="0">
-            <a:scrgbClr r="0" g="0" b="0"/>
+            <a:srgbClr val="000000"/>
           </a:lnRef>
           <a:fillRef idx="0">
-            <a:scrgbClr r="0" g="0" b="0"/>
+            <a:srgbClr val="000000"/>
           </a:fillRef>
           <a:effectRef idx="0">
-            <a:scrgbClr r="0" g="0" b="0"/>
+            <a:srgbClr val="000000"/>
           </a:effectRef>
           <a:fontRef idx="minor"/>
         </p:style>
@@ -3875,6 +4404,7 @@
               <a:lnSpc>
                 <a:spcPct val="100000"/>
               </a:lnSpc>
+              <a:defRPr/>
             </a:pPr>
             <a:r>
               <a:rPr lang="de-DE" sz="1200" b="0" strike="noStrike" spc="-1">
@@ -3893,11 +4423,11 @@
       </p:sp>
       <p:sp>
         <p:nvSpPr>
-          <p:cNvPr id="254" name="Gerade Verbindung 12"/>
+          <p:cNvPr id="1068437842" name="Gerade Verbindung 12"/>
           <p:cNvSpPr/>
           <p:nvPr/>
         </p:nvSpPr>
-        <p:spPr>
+        <p:spPr bwMode="auto">
           <a:xfrm>
             <a:off x="1981080" y="1738440"/>
             <a:ext cx="1227960" cy="360"/>
@@ -3930,11 +4460,11 @@
       </p:sp>
       <p:sp>
         <p:nvSpPr>
-          <p:cNvPr id="255" name="Textfeld 36"/>
+          <p:cNvPr id="312403507" name="Textfeld 36"/>
           <p:cNvSpPr/>
           <p:nvPr/>
         </p:nvSpPr>
-        <p:spPr>
+        <p:spPr bwMode="auto">
           <a:xfrm>
             <a:off x="609480" y="3095640"/>
             <a:ext cx="1523520" cy="272880"/>
@@ -3949,13 +4479,13 @@
         </p:spPr>
         <p:style>
           <a:lnRef idx="0">
-            <a:scrgbClr r="0" g="0" b="0"/>
+            <a:srgbClr val="000000"/>
           </a:lnRef>
           <a:fillRef idx="0">
-            <a:scrgbClr r="0" g="0" b="0"/>
+            <a:srgbClr val="000000"/>
           </a:fillRef>
           <a:effectRef idx="0">
-            <a:scrgbClr r="0" g="0" b="0"/>
+            <a:srgbClr val="000000"/>
           </a:effectRef>
           <a:fontRef idx="minor"/>
         </p:style>
@@ -3969,6 +4499,7 @@
               <a:lnSpc>
                 <a:spcPct val="100000"/>
               </a:lnSpc>
+              <a:defRPr/>
             </a:pPr>
             <a:r>
               <a:rPr lang="de-DE" sz="1200" b="0" strike="noStrike" spc="-1">
@@ -3987,11 +4518,11 @@
       </p:sp>
       <p:sp>
         <p:nvSpPr>
-          <p:cNvPr id="256" name="Textfeld 37"/>
+          <p:cNvPr id="1795724442" name="Textfeld 37"/>
           <p:cNvSpPr/>
           <p:nvPr/>
         </p:nvSpPr>
-        <p:spPr>
+        <p:spPr bwMode="auto">
           <a:xfrm>
             <a:off x="609480" y="4896720"/>
             <a:ext cx="1371240" cy="257760"/>
@@ -4006,13 +4537,13 @@
         </p:spPr>
         <p:style>
           <a:lnRef idx="0">
-            <a:scrgbClr r="0" g="0" b="0"/>
+            <a:srgbClr val="000000"/>
           </a:lnRef>
           <a:fillRef idx="0">
-            <a:scrgbClr r="0" g="0" b="0"/>
+            <a:srgbClr val="000000"/>
           </a:fillRef>
           <a:effectRef idx="0">
-            <a:scrgbClr r="0" g="0" b="0"/>
+            <a:srgbClr val="000000"/>
           </a:effectRef>
           <a:fontRef idx="minor"/>
         </p:style>
@@ -4026,6 +4557,7 @@
               <a:lnSpc>
                 <a:spcPct val="100000"/>
               </a:lnSpc>
+              <a:defRPr/>
             </a:pPr>
             <a:r>
               <a:rPr lang="de-DE" sz="1100" b="0" strike="noStrike" spc="-1">
@@ -4044,11 +4576,11 @@
       </p:sp>
       <p:sp>
         <p:nvSpPr>
-          <p:cNvPr id="257" name="Gerade Verbindung 13"/>
+          <p:cNvPr id="1797899313" name="Gerade Verbindung 13"/>
           <p:cNvSpPr/>
           <p:nvPr/>
         </p:nvSpPr>
-        <p:spPr>
+        <p:spPr bwMode="auto">
           <a:xfrm>
             <a:off x="1981080" y="5027400"/>
             <a:ext cx="1227960" cy="7560"/>
@@ -4081,11 +4613,11 @@
       </p:sp>
       <p:sp>
         <p:nvSpPr>
-          <p:cNvPr id="258" name="Textfeld 38"/>
+          <p:cNvPr id="1134953619" name="Textfeld 38"/>
           <p:cNvSpPr/>
           <p:nvPr/>
         </p:nvSpPr>
-        <p:spPr>
+        <p:spPr bwMode="auto">
           <a:xfrm>
             <a:off x="609480" y="5943600"/>
             <a:ext cx="1066320" cy="272880"/>
@@ -4100,13 +4632,13 @@
         </p:spPr>
         <p:style>
           <a:lnRef idx="0">
-            <a:scrgbClr r="0" g="0" b="0"/>
+            <a:srgbClr val="000000"/>
           </a:lnRef>
           <a:fillRef idx="0">
-            <a:scrgbClr r="0" g="0" b="0"/>
+            <a:srgbClr val="000000"/>
           </a:fillRef>
           <a:effectRef idx="0">
-            <a:scrgbClr r="0" g="0" b="0"/>
+            <a:srgbClr val="000000"/>
           </a:effectRef>
           <a:fontRef idx="minor"/>
         </p:style>
@@ -4120,6 +4652,7 @@
               <a:lnSpc>
                 <a:spcPct val="100000"/>
               </a:lnSpc>
+              <a:defRPr/>
             </a:pPr>
             <a:r>
               <a:rPr lang="de-DE" sz="1200" b="0" strike="noStrike" spc="-1">
@@ -4138,11 +4671,11 @@
       </p:sp>
       <p:sp>
         <p:nvSpPr>
-          <p:cNvPr id="259" name="Gerade Verbindung 16"/>
+          <p:cNvPr id="587249674" name="Gerade Verbindung 16"/>
           <p:cNvSpPr/>
           <p:nvPr/>
         </p:nvSpPr>
-        <p:spPr>
+        <p:spPr bwMode="auto">
           <a:xfrm>
             <a:off x="1676160" y="6081840"/>
             <a:ext cx="1539360" cy="360"/>
@@ -4175,15 +4708,15 @@
       </p:sp>
       <p:pic>
         <p:nvPicPr>
-          <p:cNvPr id="260" name="Picture 13" descr="C:\Users\NasrKasrin\Pictures\user-role.png"/>
+          <p:cNvPr id="723038368" name="Picture 13" descr="C:\Users\NasrKasrin\Pictures\user-role.png"/>
           <p:cNvPicPr/>
           <p:nvPr/>
         </p:nvPicPr>
-        <p:blipFill>
-          <a:blip r:embed="rId2"/>
+        <p:blipFill rotWithShape="1">
+          <a:blip r:embed="rId3"/>
           <a:stretch/>
         </p:blipFill>
-        <p:spPr>
+        <p:spPr bwMode="auto">
           <a:xfrm>
             <a:off x="457200" y="304920"/>
             <a:ext cx="192240" cy="213840"/>
@@ -4198,15 +4731,15 @@
       </p:pic>
       <p:pic>
         <p:nvPicPr>
-          <p:cNvPr id="261" name="Picture 14" descr="C:\Users\NasrKasrin\Pictures\user-role.png"/>
+          <p:cNvPr id="1742993997" name="Picture 14" descr="C:\Users\NasrKasrin\Pictures\user-role.png"/>
           <p:cNvPicPr/>
           <p:nvPr/>
         </p:nvPicPr>
-        <p:blipFill>
-          <a:blip r:embed="rId2"/>
+        <p:blipFill rotWithShape="1">
+          <a:blip r:embed="rId3"/>
           <a:stretch/>
         </p:blipFill>
-        <p:spPr>
+        <p:spPr bwMode="auto">
           <a:xfrm>
             <a:off x="457200" y="964080"/>
             <a:ext cx="192240" cy="213840"/>
@@ -4221,15 +4754,15 @@
       </p:pic>
       <p:pic>
         <p:nvPicPr>
-          <p:cNvPr id="262" name="Picture 15" descr="C:\Users\NasrKasrin\Pictures\user-role.png"/>
+          <p:cNvPr id="1910052322" name="Picture 15" descr="C:\Users\NasrKasrin\Pictures\user-role.png"/>
           <p:cNvPicPr/>
           <p:nvPr/>
         </p:nvPicPr>
-        <p:blipFill>
-          <a:blip r:embed="rId2"/>
+        <p:blipFill rotWithShape="1">
+          <a:blip r:embed="rId3"/>
           <a:stretch/>
         </p:blipFill>
-        <p:spPr>
+        <p:spPr bwMode="auto">
           <a:xfrm>
             <a:off x="457200" y="1611720"/>
             <a:ext cx="192240" cy="213840"/>
@@ -4244,15 +4777,15 @@
       </p:pic>
       <p:pic>
         <p:nvPicPr>
-          <p:cNvPr id="263" name="Picture 16" descr="C:\Users\NasrKasrin\Pictures\user-role.png"/>
+          <p:cNvPr id="2046064175" name="Picture 16" descr="C:\Users\NasrKasrin\Pictures\user-role.png"/>
           <p:cNvPicPr/>
           <p:nvPr/>
         </p:nvPicPr>
-        <p:blipFill>
-          <a:blip r:embed="rId2"/>
+        <p:blipFill rotWithShape="1">
+          <a:blip r:embed="rId3"/>
           <a:stretch/>
         </p:blipFill>
-        <p:spPr>
+        <p:spPr bwMode="auto">
           <a:xfrm>
             <a:off x="457200" y="3095640"/>
             <a:ext cx="192240" cy="213840"/>
@@ -4267,15 +4800,15 @@
       </p:pic>
       <p:pic>
         <p:nvPicPr>
-          <p:cNvPr id="264" name="Picture 17" descr="C:\Users\NasrKasrin\Pictures\user-role.png"/>
+          <p:cNvPr id="1745027113" name="Picture 17" descr="C:\Users\NasrKasrin\Pictures\user-role.png"/>
           <p:cNvPicPr/>
           <p:nvPr/>
         </p:nvPicPr>
-        <p:blipFill>
-          <a:blip r:embed="rId2"/>
+        <p:blipFill rotWithShape="1">
+          <a:blip r:embed="rId3"/>
           <a:stretch/>
         </p:blipFill>
-        <p:spPr>
+        <p:spPr bwMode="auto">
           <a:xfrm>
             <a:off x="457200" y="4896720"/>
             <a:ext cx="192240" cy="213840"/>
@@ -4290,15 +4823,15 @@
       </p:pic>
       <p:pic>
         <p:nvPicPr>
-          <p:cNvPr id="265" name="Picture 18" descr="C:\Users\NasrKasrin\Pictures\user-role.png"/>
+          <p:cNvPr id="734886098" name="Picture 18" descr="C:\Users\NasrKasrin\Pictures\user-role.png"/>
           <p:cNvPicPr/>
           <p:nvPr/>
         </p:nvPicPr>
-        <p:blipFill>
-          <a:blip r:embed="rId2"/>
+        <p:blipFill rotWithShape="1">
+          <a:blip r:embed="rId3"/>
           <a:stretch/>
         </p:blipFill>
-        <p:spPr>
+        <p:spPr bwMode="auto">
           <a:xfrm>
             <a:off x="457200" y="5943600"/>
             <a:ext cx="192240" cy="213840"/>
@@ -4313,11 +4846,11 @@
       </p:pic>
       <p:sp>
         <p:nvSpPr>
-          <p:cNvPr id="266" name="Rounded Rectangle 4"/>
+          <p:cNvPr id="1354238589" name="Rounded Rectangle 4"/>
           <p:cNvSpPr/>
           <p:nvPr/>
         </p:nvSpPr>
-        <p:spPr>
+        <p:spPr bwMode="auto">
           <a:xfrm>
             <a:off x="3414240" y="2307960"/>
             <a:ext cx="1447560" cy="827280"/>
@@ -4359,6 +4892,7 @@
               <a:lnSpc>
                 <a:spcPct val="100000"/>
               </a:lnSpc>
+              <a:defRPr/>
             </a:pPr>
             <a:r>
               <a:rPr lang="de-DE" sz="1100" b="1" strike="noStrike" spc="-1">
@@ -4377,11 +4911,11 @@
       </p:sp>
       <p:sp>
         <p:nvSpPr>
-          <p:cNvPr id="267" name="Rounded Rectangle 5"/>
+          <p:cNvPr id="1151712048" name="Rounded Rectangle 5"/>
           <p:cNvSpPr/>
           <p:nvPr/>
         </p:nvSpPr>
-        <p:spPr>
+        <p:spPr bwMode="auto">
           <a:xfrm>
             <a:off x="3400560" y="3488760"/>
             <a:ext cx="1447560" cy="827280"/>
@@ -4423,6 +4957,7 @@
               <a:lnSpc>
                 <a:spcPct val="100000"/>
               </a:lnSpc>
+              <a:defRPr/>
             </a:pPr>
             <a:r>
               <a:rPr lang="de-DE" sz="1100" b="1" strike="noStrike" spc="-1">
@@ -4441,11 +4976,11 @@
       </p:sp>
       <p:sp>
         <p:nvSpPr>
-          <p:cNvPr id="268" name="Textfeld 39"/>
+          <p:cNvPr id="28654281" name="Textfeld 39"/>
           <p:cNvSpPr/>
           <p:nvPr/>
         </p:nvSpPr>
-        <p:spPr>
+        <p:spPr bwMode="auto">
           <a:xfrm>
             <a:off x="6081480" y="3372480"/>
             <a:ext cx="2200320" cy="455400"/>
@@ -4460,13 +4995,13 @@
         </p:spPr>
         <p:style>
           <a:lnRef idx="0">
-            <a:scrgbClr r="0" g="0" b="0"/>
+            <a:srgbClr val="000000"/>
           </a:lnRef>
           <a:fillRef idx="0">
-            <a:scrgbClr r="0" g="0" b="0"/>
+            <a:srgbClr val="000000"/>
           </a:fillRef>
           <a:effectRef idx="0">
-            <a:scrgbClr r="0" g="0" b="0"/>
+            <a:srgbClr val="000000"/>
           </a:effectRef>
           <a:fontRef idx="minor"/>
         </p:style>
@@ -4480,6 +5015,7 @@
               <a:lnSpc>
                 <a:spcPct val="100000"/>
               </a:lnSpc>
+              <a:defRPr/>
             </a:pPr>
             <a:r>
               <a:rPr lang="de-DE" sz="1200" b="1" i="1" strike="noStrike" spc="-1">
@@ -4499,6 +5035,7 @@
               <a:lnSpc>
                 <a:spcPct val="100000"/>
               </a:lnSpc>
+              <a:defRPr/>
             </a:pPr>
             <a:r>
               <a:rPr lang="de-DE" sz="1200" b="1" i="1" strike="noStrike" spc="-1">
@@ -4517,11 +5054,11 @@
       </p:sp>
       <p:grpSp>
         <p:nvGrpSpPr>
-          <p:cNvPr id="269" name="Group 17"/>
+          <p:cNvPr id="1672701470" name="Group 17"/>
           <p:cNvGrpSpPr/>
           <p:nvPr/>
         </p:nvGrpSpPr>
-        <p:grpSpPr>
+        <p:grpSpPr bwMode="auto">
           <a:xfrm>
             <a:off x="8291160" y="228600"/>
             <a:ext cx="644400" cy="6248520"/>
@@ -4535,7 +5072,7 @@
             <p:cNvSpPr/>
             <p:nvPr/>
           </p:nvSpPr>
-          <p:spPr>
+          <p:spPr bwMode="auto">
             <a:xfrm>
               <a:off x="8291160" y="236880"/>
               <a:ext cx="360" cy="6239880"/>
@@ -4570,7 +5107,7 @@
             <p:cNvSpPr/>
             <p:nvPr/>
           </p:nvSpPr>
-          <p:spPr>
+          <p:spPr bwMode="auto">
             <a:xfrm>
               <a:off x="8291160" y="228600"/>
               <a:ext cx="644040" cy="360"/>
@@ -4605,7 +5142,7 @@
             <p:cNvSpPr/>
             <p:nvPr/>
           </p:nvSpPr>
-          <p:spPr>
+          <p:spPr bwMode="auto">
             <a:xfrm>
               <a:off x="8291160" y="6476760"/>
               <a:ext cx="644040" cy="360"/>
@@ -4640,7 +5177,7 @@
             <p:cNvSpPr/>
             <p:nvPr/>
           </p:nvSpPr>
-          <p:spPr>
+          <p:spPr bwMode="auto">
             <a:xfrm>
               <a:off x="8935200" y="228600"/>
               <a:ext cx="360" cy="6239880"/>
@@ -4672,15 +5209,15 @@
       </p:grpSp>
       <p:pic>
         <p:nvPicPr>
-          <p:cNvPr id="274" name="Picture 19"/>
+          <p:cNvPr id="1706062303" name="Picture 19"/>
           <p:cNvPicPr/>
           <p:nvPr/>
         </p:nvPicPr>
-        <p:blipFill>
-          <a:blip r:embed="rId3"/>
+        <p:blipFill rotWithShape="1">
+          <a:blip r:embed="rId4"/>
           <a:stretch/>
         </p:blipFill>
-        <p:spPr>
+        <p:spPr bwMode="auto">
           <a:xfrm rot="5400000">
             <a:off x="4006440" y="3929760"/>
             <a:ext cx="276480" cy="1007280"/>
@@ -4695,11 +5232,11 @@
       </p:pic>
       <p:sp>
         <p:nvSpPr>
-          <p:cNvPr id="275" name="Ellipse 11"/>
+          <p:cNvPr id="669966214" name="Ellipse 11"/>
           <p:cNvSpPr/>
           <p:nvPr/>
         </p:nvSpPr>
-        <p:spPr>
+        <p:spPr bwMode="auto">
           <a:xfrm>
             <a:off x="3429000" y="4744080"/>
             <a:ext cx="1447560" cy="609120"/>
@@ -4739,6 +5276,7 @@
               <a:lnSpc>
                 <a:spcPct val="100000"/>
               </a:lnSpc>
+              <a:defRPr/>
             </a:pPr>
             <a:r>
               <a:rPr lang="de-DE" sz="1100" b="1" strike="noStrike" spc="-1">
@@ -4757,11 +5295,11 @@
       </p:sp>
       <p:sp>
         <p:nvSpPr>
-          <p:cNvPr id="276" name="Gerade Verbindung mit Pfeil 22"/>
+          <p:cNvPr id="419365782" name="Gerade Verbindung mit Pfeil 22"/>
           <p:cNvSpPr/>
           <p:nvPr/>
         </p:nvSpPr>
-        <p:spPr>
+        <p:spPr bwMode="auto">
           <a:xfrm flipH="1">
             <a:off x="4876920" y="4972680"/>
             <a:ext cx="3412080" cy="360"/>
@@ -4773,7 +5311,7 @@
             <a:cxnLst/>
             <a:rect l="l" t="t" r="r" b="b"/>
             <a:pathLst>
-              <a:path w="21600" h="21600">
+              <a:path w="21600" h="21600" fill="norm" stroke="1" extrusionOk="0">
                 <a:moveTo>
                   <a:pt x="0" y="0"/>
                 </a:moveTo>
@@ -4807,11 +5345,11 @@
       </p:sp>
       <p:sp>
         <p:nvSpPr>
-          <p:cNvPr id="277" name="Textfeld 40"/>
+          <p:cNvPr id="341465485" name="Textfeld 40"/>
           <p:cNvSpPr/>
           <p:nvPr/>
         </p:nvSpPr>
-        <p:spPr>
+        <p:spPr bwMode="auto">
           <a:xfrm>
             <a:off x="6081480" y="4744080"/>
             <a:ext cx="2114640" cy="272880"/>
@@ -4826,13 +5364,13 @@
         </p:spPr>
         <p:style>
           <a:lnRef idx="0">
-            <a:scrgbClr r="0" g="0" b="0"/>
+            <a:srgbClr val="000000"/>
           </a:lnRef>
           <a:fillRef idx="0">
-            <a:scrgbClr r="0" g="0" b="0"/>
+            <a:srgbClr val="000000"/>
           </a:fillRef>
           <a:effectRef idx="0">
-            <a:scrgbClr r="0" g="0" b="0"/>
+            <a:srgbClr val="000000"/>
           </a:effectRef>
           <a:fontRef idx="minor"/>
         </p:style>
@@ -4846,6 +5384,7 @@
               <a:lnSpc>
                 <a:spcPct val="100000"/>
               </a:lnSpc>
+              <a:defRPr/>
             </a:pPr>
             <a:r>
               <a:rPr lang="de-DE" sz="1200" b="1" strike="noStrike" spc="-1">
@@ -4864,11 +5403,11 @@
       </p:sp>
       <p:sp>
         <p:nvSpPr>
-          <p:cNvPr id="278" name="Gerade Verbindung mit Pfeil 23"/>
+          <p:cNvPr id="884227979" name="Gerade Verbindung mit Pfeil 23"/>
           <p:cNvSpPr/>
           <p:nvPr/>
         </p:nvSpPr>
-        <p:spPr>
+        <p:spPr bwMode="auto">
           <a:xfrm>
             <a:off x="4900680" y="5201280"/>
             <a:ext cx="3380760" cy="360"/>
@@ -4880,7 +5419,7 @@
             <a:cxnLst/>
             <a:rect l="l" t="t" r="r" b="b"/>
             <a:pathLst>
-              <a:path w="21600" h="21600">
+              <a:path w="21600" h="21600" fill="norm" stroke="1" extrusionOk="0">
                 <a:moveTo>
                   <a:pt x="0" y="0"/>
                 </a:moveTo>
@@ -4914,15 +5453,15 @@
       </p:sp>
       <p:pic>
         <p:nvPicPr>
-          <p:cNvPr id="279" name="Picture 20"/>
+          <p:cNvPr id="399916504" name="Picture 20"/>
           <p:cNvPicPr/>
           <p:nvPr/>
         </p:nvPicPr>
-        <p:blipFill>
-          <a:blip r:embed="rId3"/>
+        <p:blipFill rotWithShape="1">
+          <a:blip r:embed="rId4"/>
           <a:stretch/>
         </p:blipFill>
-        <p:spPr>
+        <p:spPr bwMode="auto">
           <a:xfrm>
             <a:off x="4814640" y="3922560"/>
             <a:ext cx="442800" cy="973800"/>
@@ -4937,15 +5476,15 @@
       </p:pic>
       <p:pic>
         <p:nvPicPr>
-          <p:cNvPr id="280" name="Picture 21"/>
+          <p:cNvPr id="1921719531" name="Picture 21"/>
           <p:cNvPicPr/>
           <p:nvPr/>
         </p:nvPicPr>
-        <p:blipFill>
-          <a:blip r:embed="rId3"/>
+        <p:blipFill rotWithShape="1">
+          <a:blip r:embed="rId4"/>
           <a:stretch/>
         </p:blipFill>
-        <p:spPr>
+        <p:spPr bwMode="auto">
           <a:xfrm>
             <a:off x="4862160" y="2756880"/>
             <a:ext cx="442800" cy="973800"/>
@@ -4960,13 +5499,13 @@
       </p:pic>
       <p:sp>
         <p:nvSpPr>
-          <p:cNvPr id="281" name="Textfeld 41"/>
+          <p:cNvPr id="1855422253" name="Textfeld 41"/>
           <p:cNvSpPr/>
           <p:nvPr/>
         </p:nvSpPr>
-        <p:spPr>
-          <a:xfrm>
-            <a:off x="6095880" y="5153040"/>
+        <p:spPr bwMode="auto">
+          <a:xfrm>
+            <a:off x="6095880" y="5153039"/>
             <a:ext cx="2033280" cy="272880"/>
           </a:xfrm>
           <a:prstGeom prst="rect">
@@ -4979,13 +5518,13 @@
         </p:spPr>
         <p:style>
           <a:lnRef idx="0">
-            <a:scrgbClr r="0" g="0" b="0"/>
+            <a:srgbClr val="000000"/>
           </a:lnRef>
           <a:fillRef idx="0">
-            <a:scrgbClr r="0" g="0" b="0"/>
+            <a:srgbClr val="000000"/>
           </a:fillRef>
           <a:effectRef idx="0">
-            <a:scrgbClr r="0" g="0" b="0"/>
+            <a:srgbClr val="000000"/>
           </a:effectRef>
           <a:fontRef idx="minor"/>
         </p:style>
@@ -4999,6 +5538,7 @@
               <a:lnSpc>
                 <a:spcPct val="100000"/>
               </a:lnSpc>
+              <a:defRPr/>
             </a:pPr>
             <a:r>
               <a:rPr lang="de-DE" sz="1200" b="1" strike="noStrike" spc="-1">
@@ -5017,11 +5557,11 @@
       </p:sp>
       <p:sp>
         <p:nvSpPr>
-          <p:cNvPr id="282" name="Ellipse 12"/>
+          <p:cNvPr id="85120967" name="Ellipse 12"/>
           <p:cNvSpPr/>
           <p:nvPr/>
         </p:nvSpPr>
-        <p:spPr>
+        <p:spPr bwMode="auto">
           <a:xfrm>
             <a:off x="3400560" y="5791320"/>
             <a:ext cx="1447560" cy="609120"/>
@@ -5061,6 +5601,7 @@
               <a:lnSpc>
                 <a:spcPct val="100000"/>
               </a:lnSpc>
+              <a:defRPr/>
             </a:pPr>
             <a:r>
               <a:rPr lang="de-DE" sz="1100" b="1" strike="noStrike" spc="-1">
@@ -5079,11 +5620,11 @@
       </p:sp>
       <p:sp>
         <p:nvSpPr>
-          <p:cNvPr id="283" name="Gerade Verbindung 20"/>
+          <p:cNvPr id="1330422753" name="Gerade Verbindung 20"/>
           <p:cNvSpPr/>
           <p:nvPr/>
         </p:nvSpPr>
-        <p:spPr>
+        <p:spPr bwMode="auto">
           <a:xfrm>
             <a:off x="2133360" y="3233880"/>
             <a:ext cx="1088280" cy="360"/>
@@ -5116,15 +5657,15 @@
       </p:sp>
       <p:pic>
         <p:nvPicPr>
-          <p:cNvPr id="284" name="Picture 22"/>
+          <p:cNvPr id="1331737225" name="Picture 22"/>
           <p:cNvPicPr/>
           <p:nvPr/>
         </p:nvPicPr>
-        <p:blipFill>
-          <a:blip r:embed="rId3"/>
+        <p:blipFill rotWithShape="1">
+          <a:blip r:embed="rId4"/>
           <a:stretch/>
         </p:blipFill>
-        <p:spPr>
+        <p:spPr bwMode="auto">
           <a:xfrm>
             <a:off x="4814640" y="5049000"/>
             <a:ext cx="442800" cy="1046520"/>
@@ -5139,11 +5680,11 @@
       </p:pic>
       <p:grpSp>
         <p:nvGrpSpPr>
-          <p:cNvPr id="285" name="Group 18"/>
+          <p:cNvPr id="519769550" name="Group 18"/>
           <p:cNvGrpSpPr/>
           <p:nvPr/>
         </p:nvGrpSpPr>
-        <p:grpSpPr>
+        <p:grpSpPr bwMode="auto">
           <a:xfrm>
             <a:off x="5486400" y="121320"/>
             <a:ext cx="532800" cy="290520"/>
@@ -5157,7 +5698,7 @@
             <p:cNvSpPr/>
             <p:nvPr/>
           </p:nvSpPr>
-          <p:spPr>
+          <p:spPr bwMode="auto">
             <a:xfrm>
               <a:off x="5486400" y="152280"/>
               <a:ext cx="212040" cy="216360"/>
@@ -5202,6 +5743,7 @@
                 <a:lnSpc>
                   <a:spcPct val="100000"/>
                 </a:lnSpc>
+                <a:defRPr/>
               </a:pPr>
               <a:r>
                 <a:rPr lang="de-DE" sz="1400" b="0" i="1" strike="noStrike" spc="-1">
@@ -5224,7 +5766,7 @@
             <p:cNvSpPr/>
             <p:nvPr/>
           </p:nvSpPr>
-          <p:spPr>
+          <p:spPr bwMode="auto">
             <a:xfrm>
               <a:off x="5807160" y="164520"/>
               <a:ext cx="212040" cy="216360"/>
@@ -5269,6 +5811,7 @@
                 <a:lnSpc>
                   <a:spcPct val="100000"/>
                 </a:lnSpc>
+                <a:defRPr/>
               </a:pPr>
               <a:r>
                 <a:rPr lang="de-DE" sz="1400" b="0" i="1" strike="noStrike" spc="-1">
@@ -5291,7 +5834,7 @@
             <p:cNvSpPr/>
             <p:nvPr/>
           </p:nvSpPr>
-          <p:spPr>
+          <p:spPr bwMode="auto">
             <a:xfrm flipH="1">
               <a:off x="5715000" y="121320"/>
               <a:ext cx="92160" cy="290520"/>
@@ -5322,11 +5865,11 @@
       </p:grpSp>
       <p:grpSp>
         <p:nvGrpSpPr>
-          <p:cNvPr id="289" name="Group 19"/>
+          <p:cNvPr id="1568534212" name="Group 19"/>
           <p:cNvGrpSpPr/>
           <p:nvPr/>
         </p:nvGrpSpPr>
-        <p:grpSpPr>
+        <p:grpSpPr bwMode="auto">
           <a:xfrm>
             <a:off x="5486400" y="776160"/>
             <a:ext cx="532800" cy="290520"/>
@@ -5340,7 +5883,7 @@
             <p:cNvSpPr/>
             <p:nvPr/>
           </p:nvSpPr>
-          <p:spPr>
+          <p:spPr bwMode="auto">
             <a:xfrm>
               <a:off x="5486400" y="807120"/>
               <a:ext cx="212040" cy="216360"/>
@@ -5385,6 +5928,7 @@
                 <a:lnSpc>
                   <a:spcPct val="100000"/>
                 </a:lnSpc>
+                <a:defRPr/>
               </a:pPr>
               <a:r>
                 <a:rPr lang="de-DE" sz="1400" b="0" i="1" strike="noStrike" spc="-1">
@@ -5407,7 +5951,7 @@
             <p:cNvSpPr/>
             <p:nvPr/>
           </p:nvSpPr>
-          <p:spPr>
+          <p:spPr bwMode="auto">
             <a:xfrm>
               <a:off x="5807160" y="819360"/>
               <a:ext cx="212040" cy="216360"/>
@@ -5452,6 +5996,7 @@
                 <a:lnSpc>
                   <a:spcPct val="100000"/>
                 </a:lnSpc>
+                <a:defRPr/>
               </a:pPr>
               <a:r>
                 <a:rPr lang="de-DE" sz="1400" b="0" i="1" strike="noStrike" spc="-1">
@@ -5474,7 +6019,7 @@
             <p:cNvSpPr/>
             <p:nvPr/>
           </p:nvSpPr>
-          <p:spPr>
+          <p:spPr bwMode="auto">
             <a:xfrm flipH="1">
               <a:off x="5715000" y="776160"/>
               <a:ext cx="92160" cy="290520"/>
@@ -5505,11 +6050,11 @@
       </p:grpSp>
       <p:grpSp>
         <p:nvGrpSpPr>
-          <p:cNvPr id="293" name="Group 20"/>
+          <p:cNvPr id="1574530367" name="Group 20"/>
           <p:cNvGrpSpPr/>
           <p:nvPr/>
         </p:nvGrpSpPr>
-        <p:grpSpPr>
+        <p:grpSpPr bwMode="auto">
           <a:xfrm>
             <a:off x="5494320" y="1416600"/>
             <a:ext cx="533160" cy="290520"/>
@@ -5523,7 +6068,7 @@
             <p:cNvSpPr/>
             <p:nvPr/>
           </p:nvSpPr>
-          <p:spPr>
+          <p:spPr bwMode="auto">
             <a:xfrm>
               <a:off x="5494320" y="1447920"/>
               <a:ext cx="212040" cy="216360"/>
@@ -5568,6 +6113,7 @@
                 <a:lnSpc>
                   <a:spcPct val="100000"/>
                 </a:lnSpc>
+                <a:defRPr/>
               </a:pPr>
               <a:r>
                 <a:rPr lang="de-DE" sz="1400" b="0" i="1" strike="noStrike" spc="-1">
@@ -5590,7 +6136,7 @@
             <p:cNvSpPr/>
             <p:nvPr/>
           </p:nvSpPr>
-          <p:spPr>
+          <p:spPr bwMode="auto">
             <a:xfrm>
               <a:off x="5815440" y="1459800"/>
               <a:ext cx="212040" cy="216360"/>
@@ -5635,6 +6181,7 @@
                 <a:lnSpc>
                   <a:spcPct val="100000"/>
                 </a:lnSpc>
+                <a:defRPr/>
               </a:pPr>
               <a:r>
                 <a:rPr lang="de-DE" sz="1400" b="0" i="1" strike="noStrike" spc="-1">
@@ -5657,7 +6204,7 @@
             <p:cNvSpPr/>
             <p:nvPr/>
           </p:nvSpPr>
-          <p:spPr>
+          <p:spPr bwMode="auto">
             <a:xfrm flipH="1">
               <a:off x="5722920" y="1416600"/>
               <a:ext cx="92160" cy="290520"/>
@@ -5688,11 +6235,11 @@
       </p:grpSp>
       <p:grpSp>
         <p:nvGrpSpPr>
-          <p:cNvPr id="297" name="Group 21"/>
+          <p:cNvPr id="186181901" name="Group 21"/>
           <p:cNvGrpSpPr/>
           <p:nvPr/>
         </p:nvGrpSpPr>
-        <p:grpSpPr>
+        <p:grpSpPr bwMode="auto">
           <a:xfrm>
             <a:off x="5486400" y="2681280"/>
             <a:ext cx="532800" cy="290520"/>
@@ -5706,7 +6253,7 @@
             <p:cNvSpPr/>
             <p:nvPr/>
           </p:nvSpPr>
-          <p:spPr>
+          <p:spPr bwMode="auto">
             <a:xfrm>
               <a:off x="5486400" y="2712240"/>
               <a:ext cx="212040" cy="216360"/>
@@ -5751,6 +6298,7 @@
                 <a:lnSpc>
                   <a:spcPct val="100000"/>
                 </a:lnSpc>
+                <a:defRPr/>
               </a:pPr>
               <a:r>
                 <a:rPr lang="de-DE" sz="1400" b="0" i="1" strike="noStrike" spc="-1">
@@ -5773,7 +6321,7 @@
             <p:cNvSpPr/>
             <p:nvPr/>
           </p:nvSpPr>
-          <p:spPr>
+          <p:spPr bwMode="auto">
             <a:xfrm>
               <a:off x="5807160" y="2724120"/>
               <a:ext cx="212040" cy="216360"/>
@@ -5818,6 +6366,7 @@
                 <a:lnSpc>
                   <a:spcPct val="100000"/>
                 </a:lnSpc>
+                <a:defRPr/>
               </a:pPr>
               <a:r>
                 <a:rPr lang="de-DE" sz="1400" b="0" i="1" strike="noStrike" spc="-1">
@@ -5840,7 +6389,7 @@
             <p:cNvSpPr/>
             <p:nvPr/>
           </p:nvSpPr>
-          <p:spPr>
+          <p:spPr bwMode="auto">
             <a:xfrm flipH="1">
               <a:off x="5715000" y="2681280"/>
               <a:ext cx="92160" cy="290520"/>
@@ -5871,11 +6420,11 @@
       </p:grpSp>
       <p:grpSp>
         <p:nvGrpSpPr>
-          <p:cNvPr id="301" name="Group 22"/>
+          <p:cNvPr id="1908173482" name="Group 22"/>
           <p:cNvGrpSpPr/>
           <p:nvPr/>
         </p:nvGrpSpPr>
-        <p:grpSpPr>
+        <p:grpSpPr bwMode="auto">
           <a:xfrm>
             <a:off x="5486400" y="2190600"/>
             <a:ext cx="532800" cy="290520"/>
@@ -5889,7 +6438,7 @@
             <p:cNvSpPr/>
             <p:nvPr/>
           </p:nvSpPr>
-          <p:spPr>
+          <p:spPr bwMode="auto">
             <a:xfrm>
               <a:off x="5486400" y="2221920"/>
               <a:ext cx="212040" cy="216360"/>
@@ -5934,6 +6483,7 @@
                 <a:lnSpc>
                   <a:spcPct val="100000"/>
                 </a:lnSpc>
+                <a:defRPr/>
               </a:pPr>
               <a:r>
                 <a:rPr lang="de-DE" sz="1400" b="0" i="1" strike="noStrike" spc="-1">
@@ -5956,7 +6506,7 @@
             <p:cNvSpPr/>
             <p:nvPr/>
           </p:nvSpPr>
-          <p:spPr>
+          <p:spPr bwMode="auto">
             <a:xfrm>
               <a:off x="5807160" y="2233800"/>
               <a:ext cx="212040" cy="216360"/>
@@ -6001,6 +6551,7 @@
                 <a:lnSpc>
                   <a:spcPct val="100000"/>
                 </a:lnSpc>
+                <a:defRPr/>
               </a:pPr>
               <a:r>
                 <a:rPr lang="de-DE" sz="1400" b="0" i="1" strike="noStrike" spc="-1">
@@ -6023,7 +6574,7 @@
             <p:cNvSpPr/>
             <p:nvPr/>
           </p:nvSpPr>
-          <p:spPr>
+          <p:spPr bwMode="auto">
             <a:xfrm flipH="1">
               <a:off x="5715000" y="2190600"/>
               <a:ext cx="92160" cy="290520"/>
@@ -6054,11 +6605,11 @@
       </p:grpSp>
       <p:grpSp>
         <p:nvGrpSpPr>
-          <p:cNvPr id="305" name="Group 23"/>
+          <p:cNvPr id="2112487324" name="Group 23"/>
           <p:cNvGrpSpPr/>
           <p:nvPr/>
         </p:nvGrpSpPr>
-        <p:grpSpPr>
+        <p:grpSpPr bwMode="auto">
           <a:xfrm>
             <a:off x="5486400" y="3290760"/>
             <a:ext cx="532800" cy="290520"/>
@@ -6072,7 +6623,7 @@
             <p:cNvSpPr/>
             <p:nvPr/>
           </p:nvSpPr>
-          <p:spPr>
+          <p:spPr bwMode="auto">
             <a:xfrm>
               <a:off x="5486400" y="3321720"/>
               <a:ext cx="212040" cy="216360"/>
@@ -6117,6 +6668,7 @@
                 <a:lnSpc>
                   <a:spcPct val="100000"/>
                 </a:lnSpc>
+                <a:defRPr/>
               </a:pPr>
               <a:r>
                 <a:rPr lang="de-DE" sz="1400" b="0" i="1" strike="noStrike" spc="-1">
@@ -6139,7 +6691,7 @@
             <p:cNvSpPr/>
             <p:nvPr/>
           </p:nvSpPr>
-          <p:spPr>
+          <p:spPr bwMode="auto">
             <a:xfrm>
               <a:off x="5807160" y="3333960"/>
               <a:ext cx="212040" cy="216360"/>
@@ -6184,6 +6736,7 @@
                 <a:lnSpc>
                   <a:spcPct val="100000"/>
                 </a:lnSpc>
+                <a:defRPr/>
               </a:pPr>
               <a:r>
                 <a:rPr lang="de-DE" sz="1400" b="0" i="1" strike="noStrike" spc="-1">
@@ -6206,7 +6759,7 @@
             <p:cNvSpPr/>
             <p:nvPr/>
           </p:nvSpPr>
-          <p:spPr>
+          <p:spPr bwMode="auto">
             <a:xfrm flipH="1">
               <a:off x="5715000" y="3290760"/>
               <a:ext cx="92160" cy="290520"/>
@@ -6237,11 +6790,11 @@
       </p:grpSp>
       <p:grpSp>
         <p:nvGrpSpPr>
-          <p:cNvPr id="309" name="Group 24"/>
+          <p:cNvPr id="1395618612" name="Group 24"/>
           <p:cNvGrpSpPr/>
           <p:nvPr/>
         </p:nvGrpSpPr>
-        <p:grpSpPr>
+        <p:grpSpPr bwMode="auto">
           <a:xfrm>
             <a:off x="5486400" y="3900240"/>
             <a:ext cx="532800" cy="290520"/>
@@ -6255,7 +6808,7 @@
             <p:cNvSpPr/>
             <p:nvPr/>
           </p:nvSpPr>
-          <p:spPr>
+          <p:spPr bwMode="auto">
             <a:xfrm>
               <a:off x="5486400" y="3931560"/>
               <a:ext cx="212040" cy="216360"/>
@@ -6300,6 +6853,7 @@
                 <a:lnSpc>
                   <a:spcPct val="100000"/>
                 </a:lnSpc>
+                <a:defRPr/>
               </a:pPr>
               <a:r>
                 <a:rPr lang="de-DE" sz="1400" b="0" i="1" strike="noStrike" spc="-1">
@@ -6322,7 +6876,7 @@
             <p:cNvSpPr/>
             <p:nvPr/>
           </p:nvSpPr>
-          <p:spPr>
+          <p:spPr bwMode="auto">
             <a:xfrm>
               <a:off x="5807160" y="3943440"/>
               <a:ext cx="212040" cy="216360"/>
@@ -6367,6 +6921,7 @@
                 <a:lnSpc>
                   <a:spcPct val="100000"/>
                 </a:lnSpc>
+                <a:defRPr/>
               </a:pPr>
               <a:r>
                 <a:rPr lang="de-DE" sz="1400" b="0" i="1" strike="noStrike" spc="-1">
@@ -6389,7 +6944,7 @@
             <p:cNvSpPr/>
             <p:nvPr/>
           </p:nvSpPr>
-          <p:spPr>
+          <p:spPr bwMode="auto">
             <a:xfrm flipH="1">
               <a:off x="5715000" y="3900240"/>
               <a:ext cx="92160" cy="290520"/>
@@ -6420,11 +6975,11 @@
       </p:grpSp>
       <p:grpSp>
         <p:nvGrpSpPr>
-          <p:cNvPr id="313" name="Group 25"/>
+          <p:cNvPr id="1233733583" name="Group 25"/>
           <p:cNvGrpSpPr/>
           <p:nvPr/>
         </p:nvGrpSpPr>
-        <p:grpSpPr>
+        <p:grpSpPr bwMode="auto">
           <a:xfrm>
             <a:off x="5486400" y="4662360"/>
             <a:ext cx="532800" cy="290520"/>
@@ -6438,7 +6993,7 @@
             <p:cNvSpPr/>
             <p:nvPr/>
           </p:nvSpPr>
-          <p:spPr>
+          <p:spPr bwMode="auto">
             <a:xfrm>
               <a:off x="5486400" y="4693320"/>
               <a:ext cx="212040" cy="216360"/>
@@ -6483,6 +7038,7 @@
                 <a:lnSpc>
                   <a:spcPct val="100000"/>
                 </a:lnSpc>
+                <a:defRPr/>
               </a:pPr>
               <a:r>
                 <a:rPr lang="de-DE" sz="1400" b="0" i="1" strike="noStrike" spc="-1">
@@ -6505,7 +7061,7 @@
             <p:cNvSpPr/>
             <p:nvPr/>
           </p:nvSpPr>
-          <p:spPr>
+          <p:spPr bwMode="auto">
             <a:xfrm>
               <a:off x="5807160" y="4705560"/>
               <a:ext cx="212040" cy="216360"/>
@@ -6550,6 +7106,7 @@
                 <a:lnSpc>
                   <a:spcPct val="100000"/>
                 </a:lnSpc>
+                <a:defRPr/>
               </a:pPr>
               <a:r>
                 <a:rPr lang="de-DE" sz="1400" b="0" i="1" strike="noStrike" spc="-1">
@@ -6572,7 +7129,7 @@
             <p:cNvSpPr/>
             <p:nvPr/>
           </p:nvSpPr>
-          <p:spPr>
+          <p:spPr bwMode="auto">
             <a:xfrm flipH="1">
               <a:off x="5715000" y="4662360"/>
               <a:ext cx="92160" cy="290520"/>
@@ -6603,11 +7160,11 @@
       </p:grpSp>
       <p:grpSp>
         <p:nvGrpSpPr>
-          <p:cNvPr id="317" name="Group 26"/>
+          <p:cNvPr id="2114721477" name="Group 26"/>
           <p:cNvGrpSpPr/>
           <p:nvPr/>
         </p:nvGrpSpPr>
-        <p:grpSpPr>
+        <p:grpSpPr bwMode="auto">
           <a:xfrm>
             <a:off x="5486400" y="5228280"/>
             <a:ext cx="532800" cy="290520"/>
@@ -6621,7 +7178,7 @@
             <p:cNvSpPr/>
             <p:nvPr/>
           </p:nvSpPr>
-          <p:spPr>
+          <p:spPr bwMode="auto">
             <a:xfrm>
               <a:off x="5486400" y="5259600"/>
               <a:ext cx="212040" cy="216360"/>
@@ -6666,6 +7223,7 @@
                 <a:lnSpc>
                   <a:spcPct val="100000"/>
                 </a:lnSpc>
+                <a:defRPr/>
               </a:pPr>
               <a:r>
                 <a:rPr lang="de-DE" sz="1400" b="0" i="1" strike="noStrike" spc="-1">
@@ -6688,7 +7246,7 @@
             <p:cNvSpPr/>
             <p:nvPr/>
           </p:nvSpPr>
-          <p:spPr>
+          <p:spPr bwMode="auto">
             <a:xfrm>
               <a:off x="5807160" y="5271480"/>
               <a:ext cx="212040" cy="216360"/>
@@ -6733,6 +7291,7 @@
                 <a:lnSpc>
                   <a:spcPct val="100000"/>
                 </a:lnSpc>
+                <a:defRPr/>
               </a:pPr>
               <a:r>
                 <a:rPr lang="de-DE" sz="1400" b="0" i="1" strike="noStrike" spc="-1">
@@ -6755,7 +7314,7 @@
             <p:cNvSpPr/>
             <p:nvPr/>
           </p:nvSpPr>
-          <p:spPr>
+          <p:spPr bwMode="auto">
             <a:xfrm flipH="1">
               <a:off x="5715000" y="5228280"/>
               <a:ext cx="92160" cy="290520"/>
@@ -6786,11 +7345,11 @@
       </p:grpSp>
       <p:grpSp>
         <p:nvGrpSpPr>
-          <p:cNvPr id="321" name="Group 27"/>
+          <p:cNvPr id="2142031930" name="Group 27"/>
           <p:cNvGrpSpPr/>
           <p:nvPr/>
         </p:nvGrpSpPr>
-        <p:grpSpPr>
+        <p:grpSpPr bwMode="auto">
           <a:xfrm>
             <a:off x="5486400" y="6262560"/>
             <a:ext cx="532800" cy="290520"/>
@@ -6804,7 +7363,7 @@
             <p:cNvSpPr/>
             <p:nvPr/>
           </p:nvSpPr>
-          <p:spPr>
+          <p:spPr bwMode="auto">
             <a:xfrm>
               <a:off x="5486400" y="6293520"/>
               <a:ext cx="212040" cy="216360"/>
@@ -6849,6 +7408,7 @@
                 <a:lnSpc>
                   <a:spcPct val="100000"/>
                 </a:lnSpc>
+                <a:defRPr/>
               </a:pPr>
               <a:r>
                 <a:rPr lang="de-DE" sz="1400" b="0" i="1" strike="noStrike" spc="-1">
@@ -6871,7 +7431,7 @@
             <p:cNvSpPr/>
             <p:nvPr/>
           </p:nvSpPr>
-          <p:spPr>
+          <p:spPr bwMode="auto">
             <a:xfrm>
               <a:off x="5807160" y="6305760"/>
               <a:ext cx="212040" cy="216360"/>
@@ -6916,6 +7476,7 @@
                 <a:lnSpc>
                   <a:spcPct val="100000"/>
                 </a:lnSpc>
+                <a:defRPr/>
               </a:pPr>
               <a:r>
                 <a:rPr lang="de-DE" sz="1400" b="0" i="1" strike="noStrike" spc="-1">
@@ -6938,7 +7499,7 @@
             <p:cNvSpPr/>
             <p:nvPr/>
           </p:nvSpPr>
-          <p:spPr>
+          <p:spPr bwMode="auto">
             <a:xfrm flipH="1">
               <a:off x="5715000" y="6262560"/>
               <a:ext cx="92160" cy="290520"/>
@@ -6969,11 +7530,11 @@
       </p:grpSp>
       <p:grpSp>
         <p:nvGrpSpPr>
-          <p:cNvPr id="325" name="Group 28"/>
+          <p:cNvPr id="139641977" name="Group 28"/>
           <p:cNvGrpSpPr/>
           <p:nvPr/>
         </p:nvGrpSpPr>
-        <p:grpSpPr>
+        <p:grpSpPr bwMode="auto">
           <a:xfrm>
             <a:off x="5486400" y="5653080"/>
             <a:ext cx="532800" cy="290520"/>
@@ -6987,9 +7548,9 @@
             <p:cNvSpPr/>
             <p:nvPr/>
           </p:nvSpPr>
-          <p:spPr>
+          <p:spPr bwMode="auto">
             <a:xfrm>
-              <a:off x="5486400" y="5684040"/>
+              <a:off x="5486400" y="5684039"/>
               <a:ext cx="212040" cy="216360"/>
             </a:xfrm>
             <a:prstGeom prst="ellipse">
@@ -7032,6 +7593,7 @@
                 <a:lnSpc>
                   <a:spcPct val="100000"/>
                 </a:lnSpc>
+                <a:defRPr/>
               </a:pPr>
               <a:r>
                 <a:rPr lang="de-DE" sz="1400" b="0" i="1" strike="noStrike" spc="-1">
@@ -7054,7 +7616,7 @@
             <p:cNvSpPr/>
             <p:nvPr/>
           </p:nvSpPr>
-          <p:spPr>
+          <p:spPr bwMode="auto">
             <a:xfrm>
               <a:off x="5807160" y="5695920"/>
               <a:ext cx="212040" cy="216360"/>
@@ -7099,6 +7661,7 @@
                 <a:lnSpc>
                   <a:spcPct val="100000"/>
                 </a:lnSpc>
+                <a:defRPr/>
               </a:pPr>
               <a:r>
                 <a:rPr lang="de-DE" sz="1400" b="0" i="1" strike="noStrike" spc="-1">
@@ -7121,7 +7684,7 @@
             <p:cNvSpPr/>
             <p:nvPr/>
           </p:nvSpPr>
-          <p:spPr>
+          <p:spPr bwMode="auto">
             <a:xfrm flipH="1">
               <a:off x="5715000" y="5653080"/>
               <a:ext cx="92160" cy="290520"/>
@@ -7152,11 +7715,11 @@
       </p:grpSp>
       <p:grpSp>
         <p:nvGrpSpPr>
-          <p:cNvPr id="329" name="Group 29"/>
+          <p:cNvPr id="550019547" name="Group 29"/>
           <p:cNvGrpSpPr/>
           <p:nvPr/>
         </p:nvGrpSpPr>
-        <p:grpSpPr>
+        <p:grpSpPr bwMode="auto">
           <a:xfrm>
             <a:off x="3588480" y="2819160"/>
             <a:ext cx="532800" cy="290520"/>
@@ -7170,7 +7733,7 @@
             <p:cNvSpPr/>
             <p:nvPr/>
           </p:nvSpPr>
-          <p:spPr>
+          <p:spPr bwMode="auto">
             <a:xfrm>
               <a:off x="3588480" y="2850480"/>
               <a:ext cx="212040" cy="216360"/>
@@ -7215,6 +7778,7 @@
                 <a:lnSpc>
                   <a:spcPct val="100000"/>
                 </a:lnSpc>
+                <a:defRPr/>
               </a:pPr>
               <a:r>
                 <a:rPr lang="de-DE" sz="1400" b="0" i="1" strike="noStrike" spc="-1">
@@ -7237,7 +7801,7 @@
             <p:cNvSpPr/>
             <p:nvPr/>
           </p:nvSpPr>
-          <p:spPr>
+          <p:spPr bwMode="auto">
             <a:xfrm>
               <a:off x="3909240" y="2862360"/>
               <a:ext cx="212040" cy="216360"/>
@@ -7282,6 +7846,7 @@
                 <a:lnSpc>
                   <a:spcPct val="100000"/>
                 </a:lnSpc>
+                <a:defRPr/>
               </a:pPr>
               <a:r>
                 <a:rPr lang="de-DE" sz="1400" b="0" i="1" strike="noStrike" spc="-1">
@@ -7304,7 +7869,7 @@
             <p:cNvSpPr/>
             <p:nvPr/>
           </p:nvSpPr>
-          <p:spPr>
+          <p:spPr bwMode="auto">
             <a:xfrm flipH="1">
               <a:off x="3816720" y="2819160"/>
               <a:ext cx="92520" cy="290520"/>
@@ -7335,11 +7900,11 @@
       </p:grpSp>
       <p:grpSp>
         <p:nvGrpSpPr>
-          <p:cNvPr id="333" name="Group 30"/>
+          <p:cNvPr id="922565817" name="Group 30"/>
           <p:cNvGrpSpPr/>
           <p:nvPr/>
         </p:nvGrpSpPr>
-        <p:grpSpPr>
+        <p:grpSpPr bwMode="auto">
           <a:xfrm>
             <a:off x="4191120" y="2833560"/>
             <a:ext cx="532800" cy="290520"/>
@@ -7353,9 +7918,9 @@
             <p:cNvSpPr/>
             <p:nvPr/>
           </p:nvSpPr>
-          <p:spPr>
+          <p:spPr bwMode="auto">
             <a:xfrm>
-              <a:off x="4191120" y="2864520"/>
+              <a:off x="4191120" y="2864519"/>
               <a:ext cx="212040" cy="216360"/>
             </a:xfrm>
             <a:prstGeom prst="ellipse">
@@ -7398,6 +7963,7 @@
                 <a:lnSpc>
                   <a:spcPct val="100000"/>
                 </a:lnSpc>
+                <a:defRPr/>
               </a:pPr>
               <a:r>
                 <a:rPr lang="de-DE" sz="1400" b="0" i="1" strike="noStrike" spc="-1">
@@ -7420,7 +7986,7 @@
             <p:cNvSpPr/>
             <p:nvPr/>
           </p:nvSpPr>
-          <p:spPr>
+          <p:spPr bwMode="auto">
             <a:xfrm>
               <a:off x="4511880" y="2876760"/>
               <a:ext cx="212040" cy="216360"/>
@@ -7465,6 +8031,7 @@
                 <a:lnSpc>
                   <a:spcPct val="100000"/>
                 </a:lnSpc>
+                <a:defRPr/>
               </a:pPr>
               <a:r>
                 <a:rPr lang="de-DE" sz="1400" b="0" i="1" strike="noStrike" spc="-1">
@@ -7487,7 +8054,7 @@
             <p:cNvSpPr/>
             <p:nvPr/>
           </p:nvSpPr>
-          <p:spPr>
+          <p:spPr bwMode="auto">
             <a:xfrm flipH="1">
               <a:off x="4419360" y="2833560"/>
               <a:ext cx="92160" cy="290520"/>
@@ -7518,13 +8085,13 @@
       </p:grpSp>
       <p:sp>
         <p:nvSpPr>
-          <p:cNvPr id="337" name="Straight Connector 34"/>
+          <p:cNvPr id="2051976385" name="Straight Connector 34"/>
           <p:cNvSpPr/>
           <p:nvPr/>
         </p:nvSpPr>
-        <p:spPr>
+        <p:spPr bwMode="auto">
           <a:xfrm flipH="1">
-            <a:off x="4107960" y="2819520"/>
+            <a:off x="4107960" y="2819519"/>
             <a:ext cx="92520" cy="290520"/>
           </a:xfrm>
           <a:prstGeom prst="line">
@@ -7552,11 +8119,11 @@
       </p:sp>
       <p:sp>
         <p:nvSpPr>
-          <p:cNvPr id="338" name="Rounded Rectangle 6"/>
+          <p:cNvPr id="192900634" name="Rounded Rectangle 6"/>
           <p:cNvSpPr/>
           <p:nvPr/>
         </p:nvSpPr>
-        <p:spPr>
+        <p:spPr bwMode="auto">
           <a:xfrm>
             <a:off x="3285000" y="2133720"/>
             <a:ext cx="1751040" cy="2471400"/>
@@ -7599,6 +8166,7 @@
               <a:lnSpc>
                 <a:spcPct val="100000"/>
               </a:lnSpc>
+              <a:defRPr/>
             </a:pPr>
             <a:r>
               <a:rPr lang="de-DE" sz="1100" b="1" strike="noStrike" spc="-1">
@@ -7617,11 +8185,11 @@
       </p:sp>
       <p:sp>
         <p:nvSpPr>
-          <p:cNvPr id="339" name="Textfeld 42"/>
+          <p:cNvPr id="122049344" name="Textfeld 42"/>
           <p:cNvSpPr/>
           <p:nvPr/>
         </p:nvSpPr>
-        <p:spPr>
+        <p:spPr bwMode="auto">
           <a:xfrm>
             <a:off x="2362320" y="2362320"/>
             <a:ext cx="914040" cy="455400"/>
@@ -7636,13 +8204,13 @@
         </p:spPr>
         <p:style>
           <a:lnRef idx="0">
-            <a:scrgbClr r="0" g="0" b="0"/>
+            <a:srgbClr val="000000"/>
           </a:lnRef>
           <a:fillRef idx="0">
-            <a:scrgbClr r="0" g="0" b="0"/>
+            <a:srgbClr val="000000"/>
           </a:fillRef>
           <a:effectRef idx="0">
-            <a:scrgbClr r="0" g="0" b="0"/>
+            <a:srgbClr val="000000"/>
           </a:effectRef>
           <a:fontRef idx="minor"/>
         </p:style>
@@ -7656,6 +8224,7 @@
               <a:lnSpc>
                 <a:spcPct val="100000"/>
               </a:lnSpc>
+              <a:defRPr/>
             </a:pPr>
             <a:r>
               <a:rPr lang="de-DE" sz="1200" b="1" strike="noStrike" spc="-1">
@@ -7674,11 +8243,11 @@
       </p:sp>
       <p:grpSp>
         <p:nvGrpSpPr>
-          <p:cNvPr id="340" name="Group 31"/>
+          <p:cNvPr id="1936272036" name="Group 31"/>
           <p:cNvGrpSpPr/>
           <p:nvPr/>
         </p:nvGrpSpPr>
-        <p:grpSpPr>
+        <p:grpSpPr bwMode="auto">
           <a:xfrm>
             <a:off x="3482280" y="4004280"/>
             <a:ext cx="532800" cy="290520"/>
@@ -7692,7 +8261,7 @@
             <p:cNvSpPr/>
             <p:nvPr/>
           </p:nvSpPr>
-          <p:spPr>
+          <p:spPr bwMode="auto">
             <a:xfrm>
               <a:off x="3482280" y="4035600"/>
               <a:ext cx="212040" cy="216360"/>
@@ -7737,6 +8306,7 @@
                 <a:lnSpc>
                   <a:spcPct val="100000"/>
                 </a:lnSpc>
+                <a:defRPr/>
               </a:pPr>
               <a:r>
                 <a:rPr lang="de-DE" sz="1400" b="0" i="1" strike="noStrike" spc="-1">
@@ -7759,7 +8329,7 @@
             <p:cNvSpPr/>
             <p:nvPr/>
           </p:nvSpPr>
-          <p:spPr>
+          <p:spPr bwMode="auto">
             <a:xfrm>
               <a:off x="3803040" y="4047480"/>
               <a:ext cx="212040" cy="216360"/>
@@ -7804,6 +8374,7 @@
                 <a:lnSpc>
                   <a:spcPct val="100000"/>
                 </a:lnSpc>
+                <a:defRPr/>
               </a:pPr>
               <a:r>
                 <a:rPr lang="de-DE" sz="1400" b="0" i="1" strike="noStrike" spc="-1">
@@ -7826,9 +8397,9 @@
             <p:cNvSpPr/>
             <p:nvPr/>
           </p:nvSpPr>
-          <p:spPr>
+          <p:spPr bwMode="auto">
             <a:xfrm flipH="1">
-              <a:off x="3710520" y="4004280"/>
+              <a:off x="3710519" y="4004280"/>
               <a:ext cx="92520" cy="290520"/>
             </a:xfrm>
             <a:prstGeom prst="line">
@@ -7857,11 +8428,11 @@
       </p:grpSp>
       <p:sp>
         <p:nvSpPr>
-          <p:cNvPr id="344" name="Oval 60"/>
+          <p:cNvPr id="1790343456" name="Oval 60"/>
           <p:cNvSpPr/>
           <p:nvPr/>
         </p:nvSpPr>
-        <p:spPr>
+        <p:spPr bwMode="auto">
           <a:xfrm>
             <a:off x="3434400" y="995400"/>
             <a:ext cx="212040" cy="216360"/>
@@ -7906,6 +8477,7 @@
               <a:lnSpc>
                 <a:spcPct val="100000"/>
               </a:lnSpc>
+              <a:defRPr/>
             </a:pPr>
             <a:r>
               <a:rPr lang="de-DE" sz="1400" b="0" i="1" strike="noStrike" spc="-1">
@@ -7924,11 +8496,11 @@
       </p:sp>
       <p:sp>
         <p:nvSpPr>
-          <p:cNvPr id="345" name="Oval 61"/>
+          <p:cNvPr id="1859384540" name="Oval 61"/>
           <p:cNvSpPr/>
           <p:nvPr/>
         </p:nvSpPr>
-        <p:spPr>
+        <p:spPr bwMode="auto">
           <a:xfrm>
             <a:off x="3480480" y="5987880"/>
             <a:ext cx="212040" cy="216360"/>
@@ -7973,6 +8545,7 @@
               <a:lnSpc>
                 <a:spcPct val="100000"/>
               </a:lnSpc>
+              <a:defRPr/>
             </a:pPr>
             <a:r>
               <a:rPr lang="de-DE" sz="1400" b="0" i="1" strike="noStrike" spc="-1">
@@ -7991,20 +8564,14 @@
       </p:sp>
       <p:sp>
         <p:nvSpPr>
-          <p:cNvPr id="2" name="TextBox 1">
-            <a:extLst>
-              <a:ext uri="{FF2B5EF4-FFF2-40B4-BE49-F238E27FC236}">
-                <a16:creationId xmlns:a16="http://schemas.microsoft.com/office/drawing/2014/main" id="{2DECA46A-1F8E-7376-431A-FDB5DCDF7DB0}"/>
-              </a:ext>
-            </a:extLst>
-          </p:cNvPr>
+          <p:cNvPr id="2030331817" name="TextBox 1"/>
           <p:cNvSpPr txBox="1"/>
           <p:nvPr/>
         </p:nvSpPr>
-        <p:spPr>
-          <a:xfrm>
-            <a:off x="8363015" y="368640"/>
-            <a:ext cx="461665" cy="5936040"/>
+        <p:spPr bwMode="auto">
+          <a:xfrm>
+            <a:off x="8389007" y="368640"/>
+            <a:ext cx="411839" cy="5938199"/>
           </a:xfrm>
           <a:prstGeom prst="rect">
             <a:avLst/>
@@ -8017,11 +8584,21 @@
           </a:bodyPr>
           <a:lstStyle/>
           <a:p>
-            <a:pPr algn="ctr"/>
+            <a:pPr algn="ctr">
+              <a:defRPr/>
+            </a:pPr>
             <a:r>
-              <a:rPr lang="en-US" dirty="0"/>
-              <a:t>Data Lake Clients</a:t>
+              <a:rPr lang="de-DE" sz="1800" b="0" i="0" u="none" strike="noStrike" cap="none" spc="0">
+                <a:solidFill>
+                  <a:schemeClr val="tx1"/>
+                </a:solidFill>
+                <a:latin typeface="Arial"/>
+                <a:ea typeface="Arial"/>
+                <a:cs typeface="Arial"/>
+              </a:rPr>
+              <a:t>Catalog &amp; Metadata Service</a:t>
             </a:r>
+            <a:endParaRPr/>
           </a:p>
         </p:txBody>
       </p:sp>
@@ -8030,11 +8607,19 @@
   <p:clrMapOvr>
     <a:masterClrMapping/>
   </p:clrMapOvr>
+  <mc:AlternateContent xmlns:mc="http://schemas.openxmlformats.org/markup-compatibility/2006">
+    <mc:Choice xmlns:p159="http://schemas.microsoft.com/office/powerpoint/2015/09/main" xmlns:p14="http://schemas.microsoft.com/office/powerpoint/2010/main" Requires="p159">
+      <p:transition p14:dur="500" advClick="1"/>
+    </mc:Choice>
+    <mc:Fallback>
+      <p:transition advClick="1"/>
+    </mc:Fallback>
+  </mc:AlternateContent>
 </p:sld>
 </file>
 
 <file path=ppt/theme/theme1.xml><?xml version="1.0" encoding="utf-8"?>
-<a:theme xmlns:a="http://schemas.openxmlformats.org/drawingml/2006/main" name="Office Theme">
+<a:theme xmlns:a="http://schemas.openxmlformats.org/drawingml/2006/main" xmlns:r="http://schemas.openxmlformats.org/officeDocument/2006/relationships" xmlns:p="http://schemas.openxmlformats.org/presentationml/2006/main" name="Office Theme">
   <a:themeElements>
     <a:clrScheme name="Office">
       <a:dk1>
@@ -8091,7 +8676,7 @@
         <a:solidFill>
           <a:schemeClr val="phClr"/>
         </a:solidFill>
-        <a:gradFill rotWithShape="1">
+        <a:gradFill>
           <a:gsLst>
             <a:gs pos="0">
               <a:schemeClr val="phClr">
@@ -8114,7 +8699,7 @@
           </a:gsLst>
           <a:lin ang="16200000" scaled="1"/>
         </a:gradFill>
-        <a:gradFill rotWithShape="1">
+        <a:gradFill>
           <a:gsLst>
             <a:gs pos="0">
               <a:schemeClr val="phClr">
@@ -8208,7 +8793,7 @@
         <a:solidFill>
           <a:schemeClr val="phClr"/>
         </a:solidFill>
-        <a:gradFill rotWithShape="1">
+        <a:gradFill>
           <a:gsLst>
             <a:gs pos="0">
               <a:schemeClr val="phClr">
@@ -8230,11 +8815,9 @@
               </a:schemeClr>
             </a:gs>
           </a:gsLst>
-          <a:path path="circle">
-            <a:fillToRect l="50000" t="-80000" r="50000" b="180000"/>
-          </a:path>
+          <a:path path="circle"/>
         </a:gradFill>
-        <a:gradFill rotWithShape="1">
+        <a:gradFill>
           <a:gsLst>
             <a:gs pos="0">
               <a:schemeClr val="phClr">
@@ -8249,14 +8832,234 @@
               </a:schemeClr>
             </a:gs>
           </a:gsLst>
-          <a:path path="circle">
-            <a:fillToRect l="50000" t="50000" r="50000" b="50000"/>
-          </a:path>
+          <a:path path="circle"/>
         </a:gradFill>
       </a:bgFillStyleLst>
     </a:fmtScheme>
   </a:themeElements>
   <a:objectDefaults/>
-  <a:extraClrSchemeLst/>
+</a:theme>
+</file>
+
+<file path=ppt/theme/theme2.xml><?xml version="1.0" encoding="utf-8"?>
+<a:theme xmlns:a="http://schemas.openxmlformats.org/drawingml/2006/main" xmlns:r="http://schemas.openxmlformats.org/officeDocument/2006/relationships" xmlns:p="http://schemas.openxmlformats.org/presentationml/2006/main" name="Office Theme">
+  <a:themeElements>
+    <a:clrScheme name="Office">
+      <a:dk1>
+        <a:sysClr val="windowText" lastClr="000000"/>
+      </a:dk1>
+      <a:lt1>
+        <a:sysClr val="window" lastClr="FFFFFF"/>
+      </a:lt1>
+      <a:dk2>
+        <a:srgbClr val="1F497D"/>
+      </a:dk2>
+      <a:lt2>
+        <a:srgbClr val="EEECE1"/>
+      </a:lt2>
+      <a:accent1>
+        <a:srgbClr val="4F81BD"/>
+      </a:accent1>
+      <a:accent2>
+        <a:srgbClr val="C0504D"/>
+      </a:accent2>
+      <a:accent3>
+        <a:srgbClr val="9BBB59"/>
+      </a:accent3>
+      <a:accent4>
+        <a:srgbClr val="8064A2"/>
+      </a:accent4>
+      <a:accent5>
+        <a:srgbClr val="4BACC6"/>
+      </a:accent5>
+      <a:accent6>
+        <a:srgbClr val="F79646"/>
+      </a:accent6>
+      <a:hlink>
+        <a:srgbClr val="0000FF"/>
+      </a:hlink>
+      <a:folHlink>
+        <a:srgbClr val="800080"/>
+      </a:folHlink>
+    </a:clrScheme>
+    <a:fontScheme name="">
+      <a:majorFont>
+        <a:latin typeface="Arial"/>
+        <a:ea typeface="DejaVu Sans"/>
+        <a:cs typeface="DejaVu Sans"/>
+      </a:majorFont>
+      <a:minorFont>
+        <a:latin typeface="Arial"/>
+        <a:ea typeface="DejaVu Sans"/>
+        <a:cs typeface="DejaVu Sans"/>
+      </a:minorFont>
+    </a:fontScheme>
+    <a:fmtScheme name="Office">
+      <a:fillStyleLst>
+        <a:solidFill>
+          <a:schemeClr val="phClr"/>
+        </a:solidFill>
+        <a:gradFill>
+          <a:gsLst>
+            <a:gs pos="0">
+              <a:schemeClr val="phClr">
+                <a:tint val="50000"/>
+                <a:satMod val="300000"/>
+              </a:schemeClr>
+            </a:gs>
+            <a:gs pos="35000">
+              <a:schemeClr val="phClr">
+                <a:tint val="37000"/>
+                <a:satMod val="300000"/>
+              </a:schemeClr>
+            </a:gs>
+            <a:gs pos="100000">
+              <a:schemeClr val="phClr">
+                <a:tint val="15000"/>
+                <a:satMod val="350000"/>
+              </a:schemeClr>
+            </a:gs>
+          </a:gsLst>
+          <a:lin ang="16200000" scaled="1"/>
+        </a:gradFill>
+        <a:gradFill>
+          <a:gsLst>
+            <a:gs pos="0">
+              <a:schemeClr val="phClr">
+                <a:shade val="51000"/>
+                <a:satMod val="130000"/>
+              </a:schemeClr>
+            </a:gs>
+            <a:gs pos="80000">
+              <a:schemeClr val="phClr">
+                <a:shade val="93000"/>
+                <a:satMod val="130000"/>
+              </a:schemeClr>
+            </a:gs>
+            <a:gs pos="100000">
+              <a:schemeClr val="phClr">
+                <a:shade val="94000"/>
+                <a:satMod val="135000"/>
+              </a:schemeClr>
+            </a:gs>
+          </a:gsLst>
+          <a:lin ang="16200000" scaled="0"/>
+        </a:gradFill>
+      </a:fillStyleLst>
+      <a:lnStyleLst>
+        <a:ln w="9525" cap="flat" cmpd="sng" algn="ctr">
+          <a:solidFill>
+            <a:schemeClr val="phClr">
+              <a:shade val="95000"/>
+              <a:satMod val="105000"/>
+            </a:schemeClr>
+          </a:solidFill>
+          <a:prstDash val="solid"/>
+          <a:miter/>
+        </a:ln>
+        <a:ln w="25400" cap="flat" cmpd="sng" algn="ctr">
+          <a:solidFill>
+            <a:schemeClr val="phClr"/>
+          </a:solidFill>
+          <a:prstDash val="solid"/>
+          <a:miter/>
+        </a:ln>
+        <a:ln w="38100" cap="flat" cmpd="sng" algn="ctr">
+          <a:solidFill>
+            <a:schemeClr val="phClr"/>
+          </a:solidFill>
+          <a:prstDash val="solid"/>
+          <a:miter/>
+        </a:ln>
+      </a:lnStyleLst>
+      <a:effectStyleLst>
+        <a:effectStyle>
+          <a:effectLst>
+            <a:outerShdw blurRad="40000" dist="20000" dir="5400000" rotWithShape="0">
+              <a:srgbClr val="000000">
+                <a:alpha val="38000"/>
+              </a:srgbClr>
+            </a:outerShdw>
+          </a:effectLst>
+        </a:effectStyle>
+        <a:effectStyle>
+          <a:effectLst>
+            <a:outerShdw blurRad="40000" dist="23000" dir="5400000" rotWithShape="0">
+              <a:srgbClr val="000000">
+                <a:alpha val="35000"/>
+              </a:srgbClr>
+            </a:outerShdw>
+          </a:effectLst>
+        </a:effectStyle>
+        <a:effectStyle>
+          <a:effectLst>
+            <a:outerShdw blurRad="40000" dist="23000" dir="5400000" rotWithShape="0">
+              <a:srgbClr val="000000">
+                <a:alpha val="35000"/>
+              </a:srgbClr>
+            </a:outerShdw>
+          </a:effectLst>
+          <a:scene3d>
+            <a:camera prst="orthographicFront">
+              <a:rot lat="0" lon="0" rev="0"/>
+            </a:camera>
+            <a:lightRig rig="threePt" dir="t">
+              <a:rot lat="0" lon="0" rev="1200000"/>
+            </a:lightRig>
+          </a:scene3d>
+          <a:sp3d>
+            <a:bevelT w="63500" h="25400"/>
+          </a:sp3d>
+        </a:effectStyle>
+      </a:effectStyleLst>
+      <a:bgFillStyleLst>
+        <a:solidFill>
+          <a:schemeClr val="phClr"/>
+        </a:solidFill>
+        <a:gradFill>
+          <a:gsLst>
+            <a:gs pos="0">
+              <a:schemeClr val="phClr">
+                <a:tint val="40000"/>
+                <a:satMod val="350000"/>
+              </a:schemeClr>
+            </a:gs>
+            <a:gs pos="40000">
+              <a:schemeClr val="phClr">
+                <a:tint val="45000"/>
+                <a:shade val="99000"/>
+                <a:satMod val="350000"/>
+              </a:schemeClr>
+            </a:gs>
+            <a:gs pos="100000">
+              <a:schemeClr val="phClr">
+                <a:shade val="20000"/>
+                <a:satMod val="255000"/>
+              </a:schemeClr>
+            </a:gs>
+          </a:gsLst>
+          <a:path path="circle"/>
+        </a:gradFill>
+        <a:gradFill>
+          <a:gsLst>
+            <a:gs pos="0">
+              <a:schemeClr val="phClr">
+                <a:tint val="80000"/>
+                <a:satMod val="300000"/>
+              </a:schemeClr>
+            </a:gs>
+            <a:gs pos="100000">
+              <a:schemeClr val="phClr">
+                <a:shade val="30000"/>
+                <a:satMod val="200000"/>
+              </a:schemeClr>
+            </a:gs>
+          </a:gsLst>
+          <a:path path="circle"/>
+        </a:gradFill>
+      </a:bgFillStyleLst>
+    </a:fmtScheme>
+  </a:themeElements>
+  <a:objectDefaults/>
 </a:theme>
 </file>